--- a/submission/template_extended.pptx
+++ b/submission/template_extended.pptx
@@ -29,6 +29,7 @@
     <p:sldId id="274" r:id="rId30"/>
     <p:sldId id="275" r:id="rId31"/>
     <p:sldId id="276" r:id="rId32"/>
+    <p:sldId id="277" r:id="rId33"/>
   </p:sldIdLst>
   <p:sldSz cy="5143500" cx="9144000"/>
   <p:notesSz cx="6858000" cy="9144000"/>
@@ -9546,6 +9547,181 @@
 </p:sld>
 </file>
 
+<file path=ppt/slides/slide22.xml><?xml version="1.0" encoding="utf-8"?>
+<p:sld xmlns:a="http://schemas.openxmlformats.org/drawingml/2006/main" xmlns:r="http://schemas.openxmlformats.org/officeDocument/2006/relationships" xmlns:mc="http://schemas.openxmlformats.org/markup-compatibility/2006" xmlns:mv="urn:schemas-microsoft-com:mac:vml" xmlns:p="http://schemas.openxmlformats.org/presentationml/2006/main" xmlns:c="http://schemas.openxmlformats.org/drawingml/2006/chart" xmlns:dgm="http://schemas.openxmlformats.org/drawingml/2006/diagram" xmlns:o="urn:schemas-microsoft-com:office:office" xmlns:v="urn:schemas-microsoft-com:vml" xmlns:pvml="urn:schemas-microsoft-com:office:powerpoint" xmlns:com="http://schemas.openxmlformats.org/drawingml/2006/compatibility" xmlns:p14="http://schemas.microsoft.com/office/powerpoint/2010/main" xmlns:p15="http://schemas.microsoft.com/office/powerpoint/2012/main" xmlns:ahyp="http://schemas.microsoft.com/office/drawing/2018/hyperlinkcolor">
+  <p:cSld>
+    <p:spTree>
+      <p:nvGrpSpPr>
+        <p:cNvPr id="147" name="Shape 147"/>
+        <p:cNvGrpSpPr/>
+        <p:nvPr/>
+      </p:nvGrpSpPr>
+      <p:grpSpPr>
+        <a:xfrm>
+          <a:off x="0" y="0"/>
+          <a:ext cx="0" cy="0"/>
+          <a:chOff x="0" y="0"/>
+          <a:chExt cx="0" cy="0"/>
+        </a:xfrm>
+      </p:grpSpPr>
+      <p:pic>
+        <p:nvPicPr>
+          <p:cNvPr id="148" name="Google Shape;148;p25" title="Frame 144.png"/>
+          <p:cNvPicPr preferRelativeResize="0"/>
+          <p:nvPr/>
+        </p:nvPicPr>
+        <p:blipFill rotWithShape="1">
+          <a:blip r:embed="rId3">
+            <a:alphaModFix/>
+          </a:blip>
+          <a:srcRect b="98001" l="0" r="0" t="0"/>
+          <a:stretch/>
+        </p:blipFill>
+        <p:spPr>
+          <a:xfrm>
+            <a:off x="0" y="5093562"/>
+            <a:ext cx="9144000" cy="54275"/>
+          </a:xfrm>
+          <a:prstGeom prst="rect">
+            <a:avLst/>
+          </a:prstGeom>
+          <a:noFill/>
+          <a:ln>
+            <a:noFill/>
+          </a:ln>
+        </p:spPr>
+      </p:pic>
+      <p:pic>
+        <p:nvPicPr>
+          <p:cNvPr id="149" name="Google Shape;149;p25" title="Group 427319979.png"/>
+          <p:cNvPicPr preferRelativeResize="0"/>
+          <p:nvPr/>
+        </p:nvPicPr>
+        <p:blipFill>
+          <a:blip r:embed="rId4">
+            <a:alphaModFix/>
+          </a:blip>
+          <a:stretch>
+            <a:fillRect/>
+          </a:stretch>
+        </p:blipFill>
+        <p:spPr>
+          <a:xfrm>
+            <a:off x="0" y="1"/>
+            <a:ext cx="9144000" cy="507359"/>
+          </a:xfrm>
+          <a:prstGeom prst="rect">
+            <a:avLst/>
+          </a:prstGeom>
+          <a:noFill/>
+          <a:ln>
+            <a:noFill/>
+          </a:ln>
+        </p:spPr>
+      </p:pic>
+      <p:sp>
+        <p:nvSpPr>
+          <p:cNvPr id="150" name="Google Shape;150;p25"/>
+          <p:cNvSpPr/>
+          <p:nvPr/>
+        </p:nvSpPr>
+        <p:spPr>
+          <a:xfrm>
+            <a:off x="-29250" y="5071875"/>
+            <a:ext cx="9173400" cy="97800"/>
+          </a:xfrm>
+          <a:prstGeom prst="rect">
+            <a:avLst/>
+          </a:prstGeom>
+          <a:solidFill>
+            <a:schemeClr val="dk1"/>
+          </a:solidFill>
+          <a:ln>
+            <a:noFill/>
+          </a:ln>
+        </p:spPr>
+        <p:txBody>
+          <a:bodyPr anchorCtr="0" anchor="ctr" bIns="91425" lIns="91425" spcFirstLastPara="1" rIns="91425" wrap="square" tIns="91425">
+            <a:noAutofit/>
+          </a:bodyPr>
+          <a:lstStyle/>
+          <a:p>
+            <a:pPr indent="0" lvl="0" marL="0" rtl="0" algn="ctr">
+              <a:spcBef>
+                <a:spcPts val="0"/>
+              </a:spcBef>
+              <a:spcAft>
+                <a:spcPts val="0"/>
+              </a:spcAft>
+              <a:buNone/>
+            </a:pPr>
+            <a:r>
+              <a:t/>
+            </a:r>
+            <a:endParaRPr/>
+          </a:p>
+        </p:txBody>
+      </p:sp>
+      <p:sp>
+        <p:nvSpPr>
+          <p:cNvPr id="151" name="Google Shape;151;p25"/>
+          <p:cNvSpPr txBox="1"/>
+          <p:nvPr/>
+        </p:nvSpPr>
+        <p:spPr>
+          <a:xfrm>
+            <a:off x="265350" y="663825"/>
+            <a:ext cx="8943000" cy="561900"/>
+          </a:xfrm>
+          <a:prstGeom prst="rect">
+            <a:avLst/>
+          </a:prstGeom>
+          <a:noFill/>
+          <a:ln>
+            <a:noFill/>
+          </a:ln>
+        </p:spPr>
+        <p:txBody>
+          <a:bodyPr anchorCtr="0" anchor="t" bIns="91425" lIns="91425" spcFirstLastPara="1" rIns="91425" wrap="square" tIns="91425">
+            <a:noAutofit/>
+          </a:bodyPr>
+          <a:lstStyle/>
+          <a:p>
+            <a:pPr indent="0" lvl="0" marL="0" rtl="0" algn="l">
+              <a:spcBef>
+                <a:spcPts val="0"/>
+              </a:spcBef>
+              <a:spcAft>
+                <a:spcPts val="0"/>
+              </a:spcAft>
+              <a:buNone/>
+            </a:pPr>
+            <a:r>
+              <a:rPr lang="en-GB" sz="1600">
+                <a:latin typeface="Google Sans Flex Medium"/>
+                <a:ea typeface="Google Sans Flex Medium"/>
+                <a:cs typeface="Google Sans Flex Medium"/>
+                <a:sym typeface="Google Sans Flex Medium"/>
+              </a:rPr>
+              <a:t>Additional Details/Future Development (if any)</a:t>
+            </a:r>
+            <a:endParaRPr sz="1600">
+              <a:latin typeface="Google Sans Flex Medium"/>
+              <a:ea typeface="Google Sans Flex Medium"/>
+              <a:cs typeface="Google Sans Flex Medium"/>
+              <a:sym typeface="Google Sans Flex Medium"/>
+            </a:endParaRPr>
+          </a:p>
+        </p:txBody>
+      </p:sp>
+    </p:spTree>
+  </p:cSld>
+  <p:clrMapOvr>
+    <a:masterClrMapping/>
+  </p:clrMapOvr>
+</p:sld>
+</file>
+
 <file path=ppt/slides/slide3.xml><?xml version="1.0" encoding="utf-8"?>
 <p:sld xmlns:a="http://schemas.openxmlformats.org/drawingml/2006/main" xmlns:r="http://schemas.openxmlformats.org/officeDocument/2006/relationships" xmlns:mc="http://schemas.openxmlformats.org/markup-compatibility/2006" xmlns:mv="urn:schemas-microsoft-com:mac:vml" xmlns:p="http://schemas.openxmlformats.org/presentationml/2006/main" xmlns:c="http://schemas.openxmlformats.org/drawingml/2006/chart" xmlns:dgm="http://schemas.openxmlformats.org/drawingml/2006/diagram" xmlns:o="urn:schemas-microsoft-com:office:office" xmlns:v="urn:schemas-microsoft-com:vml" xmlns:pvml="urn:schemas-microsoft-com:office:powerpoint" xmlns:com="http://schemas.openxmlformats.org/drawingml/2006/compatibility" xmlns:p14="http://schemas.microsoft.com/office/powerpoint/2010/main" xmlns:p15="http://schemas.microsoft.com/office/powerpoint/2012/main" xmlns:ahyp="http://schemas.microsoft.com/office/drawing/2018/hyperlinkcolor">
   <p:cSld>

--- a/submission/template_extended.pptx
+++ b/submission/template_extended.pptx
@@ -30,6 +30,10 @@
     <p:sldId id="275" r:id="rId31"/>
     <p:sldId id="276" r:id="rId32"/>
     <p:sldId id="277" r:id="rId33"/>
+    <p:sldId id="278" r:id="rId34"/>
+    <p:sldId id="279" r:id="rId35"/>
+    <p:sldId id="280" r:id="rId36"/>
+    <p:sldId id="281" r:id="rId37"/>
   </p:sldIdLst>
   <p:sldSz cy="5143500" cx="9144000"/>
   <p:notesSz cx="6858000" cy="9144000"/>
@@ -9722,6 +9726,706 @@
 </p:sld>
 </file>
 
+<file path=ppt/slides/slide23.xml><?xml version="1.0" encoding="utf-8"?>
+<p:sld xmlns:a="http://schemas.openxmlformats.org/drawingml/2006/main" xmlns:r="http://schemas.openxmlformats.org/officeDocument/2006/relationships" xmlns:mc="http://schemas.openxmlformats.org/markup-compatibility/2006" xmlns:mv="urn:schemas-microsoft-com:mac:vml" xmlns:p="http://schemas.openxmlformats.org/presentationml/2006/main" xmlns:c="http://schemas.openxmlformats.org/drawingml/2006/chart" xmlns:dgm="http://schemas.openxmlformats.org/drawingml/2006/diagram" xmlns:o="urn:schemas-microsoft-com:office:office" xmlns:v="urn:schemas-microsoft-com:vml" xmlns:pvml="urn:schemas-microsoft-com:office:powerpoint" xmlns:com="http://schemas.openxmlformats.org/drawingml/2006/compatibility" xmlns:p14="http://schemas.microsoft.com/office/powerpoint/2010/main" xmlns:p15="http://schemas.microsoft.com/office/powerpoint/2012/main" xmlns:ahyp="http://schemas.microsoft.com/office/drawing/2018/hyperlinkcolor">
+  <p:cSld>
+    <p:spTree>
+      <p:nvGrpSpPr>
+        <p:cNvPr id="147" name="Shape 147"/>
+        <p:cNvGrpSpPr/>
+        <p:nvPr/>
+      </p:nvGrpSpPr>
+      <p:grpSpPr>
+        <a:xfrm>
+          <a:off x="0" y="0"/>
+          <a:ext cx="0" cy="0"/>
+          <a:chOff x="0" y="0"/>
+          <a:chExt cx="0" cy="0"/>
+        </a:xfrm>
+      </p:grpSpPr>
+      <p:pic>
+        <p:nvPicPr>
+          <p:cNvPr id="148" name="Google Shape;148;p25" title="Frame 144.png"/>
+          <p:cNvPicPr preferRelativeResize="0"/>
+          <p:nvPr/>
+        </p:nvPicPr>
+        <p:blipFill rotWithShape="1">
+          <a:blip r:embed="rId3">
+            <a:alphaModFix/>
+          </a:blip>
+          <a:srcRect b="98001" l="0" r="0" t="0"/>
+          <a:stretch/>
+        </p:blipFill>
+        <p:spPr>
+          <a:xfrm>
+            <a:off x="0" y="5093562"/>
+            <a:ext cx="9144000" cy="54275"/>
+          </a:xfrm>
+          <a:prstGeom prst="rect">
+            <a:avLst/>
+          </a:prstGeom>
+          <a:noFill/>
+          <a:ln>
+            <a:noFill/>
+          </a:ln>
+        </p:spPr>
+      </p:pic>
+      <p:pic>
+        <p:nvPicPr>
+          <p:cNvPr id="149" name="Google Shape;149;p25" title="Group 427319979.png"/>
+          <p:cNvPicPr preferRelativeResize="0"/>
+          <p:nvPr/>
+        </p:nvPicPr>
+        <p:blipFill>
+          <a:blip r:embed="rId4">
+            <a:alphaModFix/>
+          </a:blip>
+          <a:stretch>
+            <a:fillRect/>
+          </a:stretch>
+        </p:blipFill>
+        <p:spPr>
+          <a:xfrm>
+            <a:off x="0" y="1"/>
+            <a:ext cx="9144000" cy="507359"/>
+          </a:xfrm>
+          <a:prstGeom prst="rect">
+            <a:avLst/>
+          </a:prstGeom>
+          <a:noFill/>
+          <a:ln>
+            <a:noFill/>
+          </a:ln>
+        </p:spPr>
+      </p:pic>
+      <p:sp>
+        <p:nvSpPr>
+          <p:cNvPr id="150" name="Google Shape;150;p25"/>
+          <p:cNvSpPr/>
+          <p:nvPr/>
+        </p:nvSpPr>
+        <p:spPr>
+          <a:xfrm>
+            <a:off x="-29250" y="5071875"/>
+            <a:ext cx="9173400" cy="97800"/>
+          </a:xfrm>
+          <a:prstGeom prst="rect">
+            <a:avLst/>
+          </a:prstGeom>
+          <a:solidFill>
+            <a:schemeClr val="dk1"/>
+          </a:solidFill>
+          <a:ln>
+            <a:noFill/>
+          </a:ln>
+        </p:spPr>
+        <p:txBody>
+          <a:bodyPr anchorCtr="0" anchor="ctr" bIns="91425" lIns="91425" spcFirstLastPara="1" rIns="91425" wrap="square" tIns="91425">
+            <a:noAutofit/>
+          </a:bodyPr>
+          <a:lstStyle/>
+          <a:p>
+            <a:pPr indent="0" lvl="0" marL="0" rtl="0" algn="ctr">
+              <a:spcBef>
+                <a:spcPts val="0"/>
+              </a:spcBef>
+              <a:spcAft>
+                <a:spcPts val="0"/>
+              </a:spcAft>
+              <a:buNone/>
+            </a:pPr>
+            <a:r>
+              <a:t/>
+            </a:r>
+            <a:endParaRPr/>
+          </a:p>
+        </p:txBody>
+      </p:sp>
+      <p:sp>
+        <p:nvSpPr>
+          <p:cNvPr id="151" name="Google Shape;151;p25"/>
+          <p:cNvSpPr txBox="1"/>
+          <p:nvPr/>
+        </p:nvSpPr>
+        <p:spPr>
+          <a:xfrm>
+            <a:off x="265350" y="663825"/>
+            <a:ext cx="8943000" cy="561900"/>
+          </a:xfrm>
+          <a:prstGeom prst="rect">
+            <a:avLst/>
+          </a:prstGeom>
+          <a:noFill/>
+          <a:ln>
+            <a:noFill/>
+          </a:ln>
+        </p:spPr>
+        <p:txBody>
+          <a:bodyPr anchorCtr="0" anchor="t" bIns="91425" lIns="91425" spcFirstLastPara="1" rIns="91425" wrap="square" tIns="91425">
+            <a:noAutofit/>
+          </a:bodyPr>
+          <a:lstStyle/>
+          <a:p>
+            <a:pPr indent="0" lvl="0" marL="0" rtl="0" algn="l">
+              <a:spcBef>
+                <a:spcPts val="0"/>
+              </a:spcBef>
+              <a:spcAft>
+                <a:spcPts val="0"/>
+              </a:spcAft>
+              <a:buNone/>
+            </a:pPr>
+            <a:r>
+              <a:rPr lang="en-GB" sz="1600">
+                <a:latin typeface="Google Sans Flex Medium"/>
+                <a:ea typeface="Google Sans Flex Medium"/>
+                <a:cs typeface="Google Sans Flex Medium"/>
+                <a:sym typeface="Google Sans Flex Medium"/>
+              </a:rPr>
+              <a:t>Additional Details/Future Development (if any)</a:t>
+            </a:r>
+            <a:endParaRPr sz="1600">
+              <a:latin typeface="Google Sans Flex Medium"/>
+              <a:ea typeface="Google Sans Flex Medium"/>
+              <a:cs typeface="Google Sans Flex Medium"/>
+              <a:sym typeface="Google Sans Flex Medium"/>
+            </a:endParaRPr>
+          </a:p>
+        </p:txBody>
+      </p:sp>
+    </p:spTree>
+  </p:cSld>
+  <p:clrMapOvr>
+    <a:masterClrMapping/>
+  </p:clrMapOvr>
+</p:sld>
+</file>
+
+<file path=ppt/slides/slide24.xml><?xml version="1.0" encoding="utf-8"?>
+<p:sld xmlns:a="http://schemas.openxmlformats.org/drawingml/2006/main" xmlns:r="http://schemas.openxmlformats.org/officeDocument/2006/relationships" xmlns:mc="http://schemas.openxmlformats.org/markup-compatibility/2006" xmlns:mv="urn:schemas-microsoft-com:mac:vml" xmlns:p="http://schemas.openxmlformats.org/presentationml/2006/main" xmlns:c="http://schemas.openxmlformats.org/drawingml/2006/chart" xmlns:dgm="http://schemas.openxmlformats.org/drawingml/2006/diagram" xmlns:o="urn:schemas-microsoft-com:office:office" xmlns:v="urn:schemas-microsoft-com:vml" xmlns:pvml="urn:schemas-microsoft-com:office:powerpoint" xmlns:com="http://schemas.openxmlformats.org/drawingml/2006/compatibility" xmlns:p14="http://schemas.microsoft.com/office/powerpoint/2010/main" xmlns:p15="http://schemas.microsoft.com/office/powerpoint/2012/main" xmlns:ahyp="http://schemas.microsoft.com/office/drawing/2018/hyperlinkcolor">
+  <p:cSld>
+    <p:spTree>
+      <p:nvGrpSpPr>
+        <p:cNvPr id="147" name="Shape 147"/>
+        <p:cNvGrpSpPr/>
+        <p:nvPr/>
+      </p:nvGrpSpPr>
+      <p:grpSpPr>
+        <a:xfrm>
+          <a:off x="0" y="0"/>
+          <a:ext cx="0" cy="0"/>
+          <a:chOff x="0" y="0"/>
+          <a:chExt cx="0" cy="0"/>
+        </a:xfrm>
+      </p:grpSpPr>
+      <p:pic>
+        <p:nvPicPr>
+          <p:cNvPr id="148" name="Google Shape;148;p25" title="Frame 144.png"/>
+          <p:cNvPicPr preferRelativeResize="0"/>
+          <p:nvPr/>
+        </p:nvPicPr>
+        <p:blipFill rotWithShape="1">
+          <a:blip r:embed="rId3">
+            <a:alphaModFix/>
+          </a:blip>
+          <a:srcRect b="98001" l="0" r="0" t="0"/>
+          <a:stretch/>
+        </p:blipFill>
+        <p:spPr>
+          <a:xfrm>
+            <a:off x="0" y="5093562"/>
+            <a:ext cx="9144000" cy="54275"/>
+          </a:xfrm>
+          <a:prstGeom prst="rect">
+            <a:avLst/>
+          </a:prstGeom>
+          <a:noFill/>
+          <a:ln>
+            <a:noFill/>
+          </a:ln>
+        </p:spPr>
+      </p:pic>
+      <p:pic>
+        <p:nvPicPr>
+          <p:cNvPr id="149" name="Google Shape;149;p25" title="Group 427319979.png"/>
+          <p:cNvPicPr preferRelativeResize="0"/>
+          <p:nvPr/>
+        </p:nvPicPr>
+        <p:blipFill>
+          <a:blip r:embed="rId4">
+            <a:alphaModFix/>
+          </a:blip>
+          <a:stretch>
+            <a:fillRect/>
+          </a:stretch>
+        </p:blipFill>
+        <p:spPr>
+          <a:xfrm>
+            <a:off x="0" y="1"/>
+            <a:ext cx="9144000" cy="507359"/>
+          </a:xfrm>
+          <a:prstGeom prst="rect">
+            <a:avLst/>
+          </a:prstGeom>
+          <a:noFill/>
+          <a:ln>
+            <a:noFill/>
+          </a:ln>
+        </p:spPr>
+      </p:pic>
+      <p:sp>
+        <p:nvSpPr>
+          <p:cNvPr id="150" name="Google Shape;150;p25"/>
+          <p:cNvSpPr/>
+          <p:nvPr/>
+        </p:nvSpPr>
+        <p:spPr>
+          <a:xfrm>
+            <a:off x="-29250" y="5071875"/>
+            <a:ext cx="9173400" cy="97800"/>
+          </a:xfrm>
+          <a:prstGeom prst="rect">
+            <a:avLst/>
+          </a:prstGeom>
+          <a:solidFill>
+            <a:schemeClr val="dk1"/>
+          </a:solidFill>
+          <a:ln>
+            <a:noFill/>
+          </a:ln>
+        </p:spPr>
+        <p:txBody>
+          <a:bodyPr anchorCtr="0" anchor="ctr" bIns="91425" lIns="91425" spcFirstLastPara="1" rIns="91425" wrap="square" tIns="91425">
+            <a:noAutofit/>
+          </a:bodyPr>
+          <a:lstStyle/>
+          <a:p>
+            <a:pPr indent="0" lvl="0" marL="0" rtl="0" algn="ctr">
+              <a:spcBef>
+                <a:spcPts val="0"/>
+              </a:spcBef>
+              <a:spcAft>
+                <a:spcPts val="0"/>
+              </a:spcAft>
+              <a:buNone/>
+            </a:pPr>
+            <a:r>
+              <a:t/>
+            </a:r>
+            <a:endParaRPr/>
+          </a:p>
+        </p:txBody>
+      </p:sp>
+      <p:sp>
+        <p:nvSpPr>
+          <p:cNvPr id="151" name="Google Shape;151;p25"/>
+          <p:cNvSpPr txBox="1"/>
+          <p:nvPr/>
+        </p:nvSpPr>
+        <p:spPr>
+          <a:xfrm>
+            <a:off x="265350" y="663825"/>
+            <a:ext cx="8943000" cy="561900"/>
+          </a:xfrm>
+          <a:prstGeom prst="rect">
+            <a:avLst/>
+          </a:prstGeom>
+          <a:noFill/>
+          <a:ln>
+            <a:noFill/>
+          </a:ln>
+        </p:spPr>
+        <p:txBody>
+          <a:bodyPr anchorCtr="0" anchor="t" bIns="91425" lIns="91425" spcFirstLastPara="1" rIns="91425" wrap="square" tIns="91425">
+            <a:noAutofit/>
+          </a:bodyPr>
+          <a:lstStyle/>
+          <a:p>
+            <a:pPr indent="0" lvl="0" marL="0" rtl="0" algn="l">
+              <a:spcBef>
+                <a:spcPts val="0"/>
+              </a:spcBef>
+              <a:spcAft>
+                <a:spcPts val="0"/>
+              </a:spcAft>
+              <a:buNone/>
+            </a:pPr>
+            <a:r>
+              <a:rPr lang="en-GB" sz="1600">
+                <a:latin typeface="Google Sans Flex Medium"/>
+                <a:ea typeface="Google Sans Flex Medium"/>
+                <a:cs typeface="Google Sans Flex Medium"/>
+                <a:sym typeface="Google Sans Flex Medium"/>
+              </a:rPr>
+              <a:t>Additional Details/Future Development (if any)</a:t>
+            </a:r>
+            <a:endParaRPr sz="1600">
+              <a:latin typeface="Google Sans Flex Medium"/>
+              <a:ea typeface="Google Sans Flex Medium"/>
+              <a:cs typeface="Google Sans Flex Medium"/>
+              <a:sym typeface="Google Sans Flex Medium"/>
+            </a:endParaRPr>
+          </a:p>
+        </p:txBody>
+      </p:sp>
+    </p:spTree>
+  </p:cSld>
+  <p:clrMapOvr>
+    <a:masterClrMapping/>
+  </p:clrMapOvr>
+</p:sld>
+</file>
+
+<file path=ppt/slides/slide25.xml><?xml version="1.0" encoding="utf-8"?>
+<p:sld xmlns:a="http://schemas.openxmlformats.org/drawingml/2006/main" xmlns:r="http://schemas.openxmlformats.org/officeDocument/2006/relationships" xmlns:mc="http://schemas.openxmlformats.org/markup-compatibility/2006" xmlns:mv="urn:schemas-microsoft-com:mac:vml" xmlns:p="http://schemas.openxmlformats.org/presentationml/2006/main" xmlns:c="http://schemas.openxmlformats.org/drawingml/2006/chart" xmlns:dgm="http://schemas.openxmlformats.org/drawingml/2006/diagram" xmlns:o="urn:schemas-microsoft-com:office:office" xmlns:v="urn:schemas-microsoft-com:vml" xmlns:pvml="urn:schemas-microsoft-com:office:powerpoint" xmlns:com="http://schemas.openxmlformats.org/drawingml/2006/compatibility" xmlns:p14="http://schemas.microsoft.com/office/powerpoint/2010/main" xmlns:p15="http://schemas.microsoft.com/office/powerpoint/2012/main" xmlns:ahyp="http://schemas.microsoft.com/office/drawing/2018/hyperlinkcolor">
+  <p:cSld>
+    <p:spTree>
+      <p:nvGrpSpPr>
+        <p:cNvPr id="147" name="Shape 147"/>
+        <p:cNvGrpSpPr/>
+        <p:nvPr/>
+      </p:nvGrpSpPr>
+      <p:grpSpPr>
+        <a:xfrm>
+          <a:off x="0" y="0"/>
+          <a:ext cx="0" cy="0"/>
+          <a:chOff x="0" y="0"/>
+          <a:chExt cx="0" cy="0"/>
+        </a:xfrm>
+      </p:grpSpPr>
+      <p:pic>
+        <p:nvPicPr>
+          <p:cNvPr id="148" name="Google Shape;148;p25" title="Frame 144.png"/>
+          <p:cNvPicPr preferRelativeResize="0"/>
+          <p:nvPr/>
+        </p:nvPicPr>
+        <p:blipFill rotWithShape="1">
+          <a:blip r:embed="rId3">
+            <a:alphaModFix/>
+          </a:blip>
+          <a:srcRect b="98001" l="0" r="0" t="0"/>
+          <a:stretch/>
+        </p:blipFill>
+        <p:spPr>
+          <a:xfrm>
+            <a:off x="0" y="5093562"/>
+            <a:ext cx="9144000" cy="54275"/>
+          </a:xfrm>
+          <a:prstGeom prst="rect">
+            <a:avLst/>
+          </a:prstGeom>
+          <a:noFill/>
+          <a:ln>
+            <a:noFill/>
+          </a:ln>
+        </p:spPr>
+      </p:pic>
+      <p:pic>
+        <p:nvPicPr>
+          <p:cNvPr id="149" name="Google Shape;149;p25" title="Group 427319979.png"/>
+          <p:cNvPicPr preferRelativeResize="0"/>
+          <p:nvPr/>
+        </p:nvPicPr>
+        <p:blipFill>
+          <a:blip r:embed="rId4">
+            <a:alphaModFix/>
+          </a:blip>
+          <a:stretch>
+            <a:fillRect/>
+          </a:stretch>
+        </p:blipFill>
+        <p:spPr>
+          <a:xfrm>
+            <a:off x="0" y="1"/>
+            <a:ext cx="9144000" cy="507359"/>
+          </a:xfrm>
+          <a:prstGeom prst="rect">
+            <a:avLst/>
+          </a:prstGeom>
+          <a:noFill/>
+          <a:ln>
+            <a:noFill/>
+          </a:ln>
+        </p:spPr>
+      </p:pic>
+      <p:sp>
+        <p:nvSpPr>
+          <p:cNvPr id="150" name="Google Shape;150;p25"/>
+          <p:cNvSpPr/>
+          <p:nvPr/>
+        </p:nvSpPr>
+        <p:spPr>
+          <a:xfrm>
+            <a:off x="-29250" y="5071875"/>
+            <a:ext cx="9173400" cy="97800"/>
+          </a:xfrm>
+          <a:prstGeom prst="rect">
+            <a:avLst/>
+          </a:prstGeom>
+          <a:solidFill>
+            <a:schemeClr val="dk1"/>
+          </a:solidFill>
+          <a:ln>
+            <a:noFill/>
+          </a:ln>
+        </p:spPr>
+        <p:txBody>
+          <a:bodyPr anchorCtr="0" anchor="ctr" bIns="91425" lIns="91425" spcFirstLastPara="1" rIns="91425" wrap="square" tIns="91425">
+            <a:noAutofit/>
+          </a:bodyPr>
+          <a:lstStyle/>
+          <a:p>
+            <a:pPr indent="0" lvl="0" marL="0" rtl="0" algn="ctr">
+              <a:spcBef>
+                <a:spcPts val="0"/>
+              </a:spcBef>
+              <a:spcAft>
+                <a:spcPts val="0"/>
+              </a:spcAft>
+              <a:buNone/>
+            </a:pPr>
+            <a:r>
+              <a:t/>
+            </a:r>
+            <a:endParaRPr/>
+          </a:p>
+        </p:txBody>
+      </p:sp>
+      <p:sp>
+        <p:nvSpPr>
+          <p:cNvPr id="151" name="Google Shape;151;p25"/>
+          <p:cNvSpPr txBox="1"/>
+          <p:nvPr/>
+        </p:nvSpPr>
+        <p:spPr>
+          <a:xfrm>
+            <a:off x="265350" y="663825"/>
+            <a:ext cx="8943000" cy="561900"/>
+          </a:xfrm>
+          <a:prstGeom prst="rect">
+            <a:avLst/>
+          </a:prstGeom>
+          <a:noFill/>
+          <a:ln>
+            <a:noFill/>
+          </a:ln>
+        </p:spPr>
+        <p:txBody>
+          <a:bodyPr anchorCtr="0" anchor="t" bIns="91425" lIns="91425" spcFirstLastPara="1" rIns="91425" wrap="square" tIns="91425">
+            <a:noAutofit/>
+          </a:bodyPr>
+          <a:lstStyle/>
+          <a:p>
+            <a:pPr indent="0" lvl="0" marL="0" rtl="0" algn="l">
+              <a:spcBef>
+                <a:spcPts val="0"/>
+              </a:spcBef>
+              <a:spcAft>
+                <a:spcPts val="0"/>
+              </a:spcAft>
+              <a:buNone/>
+            </a:pPr>
+            <a:r>
+              <a:rPr lang="en-GB" sz="1600">
+                <a:latin typeface="Google Sans Flex Medium"/>
+                <a:ea typeface="Google Sans Flex Medium"/>
+                <a:cs typeface="Google Sans Flex Medium"/>
+                <a:sym typeface="Google Sans Flex Medium"/>
+              </a:rPr>
+              <a:t>Additional Details/Future Development (if any)</a:t>
+            </a:r>
+            <a:endParaRPr sz="1600">
+              <a:latin typeface="Google Sans Flex Medium"/>
+              <a:ea typeface="Google Sans Flex Medium"/>
+              <a:cs typeface="Google Sans Flex Medium"/>
+              <a:sym typeface="Google Sans Flex Medium"/>
+            </a:endParaRPr>
+          </a:p>
+        </p:txBody>
+      </p:sp>
+    </p:spTree>
+  </p:cSld>
+  <p:clrMapOvr>
+    <a:masterClrMapping/>
+  </p:clrMapOvr>
+</p:sld>
+</file>
+
+<file path=ppt/slides/slide26.xml><?xml version="1.0" encoding="utf-8"?>
+<p:sld xmlns:a="http://schemas.openxmlformats.org/drawingml/2006/main" xmlns:r="http://schemas.openxmlformats.org/officeDocument/2006/relationships" xmlns:mc="http://schemas.openxmlformats.org/markup-compatibility/2006" xmlns:mv="urn:schemas-microsoft-com:mac:vml" xmlns:p="http://schemas.openxmlformats.org/presentationml/2006/main" xmlns:c="http://schemas.openxmlformats.org/drawingml/2006/chart" xmlns:dgm="http://schemas.openxmlformats.org/drawingml/2006/diagram" xmlns:o="urn:schemas-microsoft-com:office:office" xmlns:v="urn:schemas-microsoft-com:vml" xmlns:pvml="urn:schemas-microsoft-com:office:powerpoint" xmlns:com="http://schemas.openxmlformats.org/drawingml/2006/compatibility" xmlns:p14="http://schemas.microsoft.com/office/powerpoint/2010/main" xmlns:p15="http://schemas.microsoft.com/office/powerpoint/2012/main" xmlns:ahyp="http://schemas.microsoft.com/office/drawing/2018/hyperlinkcolor">
+  <p:cSld>
+    <p:spTree>
+      <p:nvGrpSpPr>
+        <p:cNvPr id="147" name="Shape 147"/>
+        <p:cNvGrpSpPr/>
+        <p:nvPr/>
+      </p:nvGrpSpPr>
+      <p:grpSpPr>
+        <a:xfrm>
+          <a:off x="0" y="0"/>
+          <a:ext cx="0" cy="0"/>
+          <a:chOff x="0" y="0"/>
+          <a:chExt cx="0" cy="0"/>
+        </a:xfrm>
+      </p:grpSpPr>
+      <p:pic>
+        <p:nvPicPr>
+          <p:cNvPr id="148" name="Google Shape;148;p25" title="Frame 144.png"/>
+          <p:cNvPicPr preferRelativeResize="0"/>
+          <p:nvPr/>
+        </p:nvPicPr>
+        <p:blipFill rotWithShape="1">
+          <a:blip r:embed="rId3">
+            <a:alphaModFix/>
+          </a:blip>
+          <a:srcRect b="98001" l="0" r="0" t="0"/>
+          <a:stretch/>
+        </p:blipFill>
+        <p:spPr>
+          <a:xfrm>
+            <a:off x="0" y="5093562"/>
+            <a:ext cx="9144000" cy="54275"/>
+          </a:xfrm>
+          <a:prstGeom prst="rect">
+            <a:avLst/>
+          </a:prstGeom>
+          <a:noFill/>
+          <a:ln>
+            <a:noFill/>
+          </a:ln>
+        </p:spPr>
+      </p:pic>
+      <p:pic>
+        <p:nvPicPr>
+          <p:cNvPr id="149" name="Google Shape;149;p25" title="Group 427319979.png"/>
+          <p:cNvPicPr preferRelativeResize="0"/>
+          <p:nvPr/>
+        </p:nvPicPr>
+        <p:blipFill>
+          <a:blip r:embed="rId4">
+            <a:alphaModFix/>
+          </a:blip>
+          <a:stretch>
+            <a:fillRect/>
+          </a:stretch>
+        </p:blipFill>
+        <p:spPr>
+          <a:xfrm>
+            <a:off x="0" y="1"/>
+            <a:ext cx="9144000" cy="507359"/>
+          </a:xfrm>
+          <a:prstGeom prst="rect">
+            <a:avLst/>
+          </a:prstGeom>
+          <a:noFill/>
+          <a:ln>
+            <a:noFill/>
+          </a:ln>
+        </p:spPr>
+      </p:pic>
+      <p:sp>
+        <p:nvSpPr>
+          <p:cNvPr id="150" name="Google Shape;150;p25"/>
+          <p:cNvSpPr/>
+          <p:nvPr/>
+        </p:nvSpPr>
+        <p:spPr>
+          <a:xfrm>
+            <a:off x="-29250" y="5071875"/>
+            <a:ext cx="9173400" cy="97800"/>
+          </a:xfrm>
+          <a:prstGeom prst="rect">
+            <a:avLst/>
+          </a:prstGeom>
+          <a:solidFill>
+            <a:schemeClr val="dk1"/>
+          </a:solidFill>
+          <a:ln>
+            <a:noFill/>
+          </a:ln>
+        </p:spPr>
+        <p:txBody>
+          <a:bodyPr anchorCtr="0" anchor="ctr" bIns="91425" lIns="91425" spcFirstLastPara="1" rIns="91425" wrap="square" tIns="91425">
+            <a:noAutofit/>
+          </a:bodyPr>
+          <a:lstStyle/>
+          <a:p>
+            <a:pPr indent="0" lvl="0" marL="0" rtl="0" algn="ctr">
+              <a:spcBef>
+                <a:spcPts val="0"/>
+              </a:spcBef>
+              <a:spcAft>
+                <a:spcPts val="0"/>
+              </a:spcAft>
+              <a:buNone/>
+            </a:pPr>
+            <a:r>
+              <a:t/>
+            </a:r>
+            <a:endParaRPr/>
+          </a:p>
+        </p:txBody>
+      </p:sp>
+      <p:sp>
+        <p:nvSpPr>
+          <p:cNvPr id="151" name="Google Shape;151;p25"/>
+          <p:cNvSpPr txBox="1"/>
+          <p:nvPr/>
+        </p:nvSpPr>
+        <p:spPr>
+          <a:xfrm>
+            <a:off x="265350" y="663825"/>
+            <a:ext cx="8943000" cy="561900"/>
+          </a:xfrm>
+          <a:prstGeom prst="rect">
+            <a:avLst/>
+          </a:prstGeom>
+          <a:noFill/>
+          <a:ln>
+            <a:noFill/>
+          </a:ln>
+        </p:spPr>
+        <p:txBody>
+          <a:bodyPr anchorCtr="0" anchor="t" bIns="91425" lIns="91425" spcFirstLastPara="1" rIns="91425" wrap="square" tIns="91425">
+            <a:noAutofit/>
+          </a:bodyPr>
+          <a:lstStyle/>
+          <a:p>
+            <a:pPr indent="0" lvl="0" marL="0" rtl="0" algn="l">
+              <a:spcBef>
+                <a:spcPts val="0"/>
+              </a:spcBef>
+              <a:spcAft>
+                <a:spcPts val="0"/>
+              </a:spcAft>
+              <a:buNone/>
+            </a:pPr>
+            <a:r>
+              <a:rPr lang="en-GB" sz="1600">
+                <a:latin typeface="Google Sans Flex Medium"/>
+                <a:ea typeface="Google Sans Flex Medium"/>
+                <a:cs typeface="Google Sans Flex Medium"/>
+                <a:sym typeface="Google Sans Flex Medium"/>
+              </a:rPr>
+              <a:t>Additional Details/Future Development (if any)</a:t>
+            </a:r>
+            <a:endParaRPr sz="1600">
+              <a:latin typeface="Google Sans Flex Medium"/>
+              <a:ea typeface="Google Sans Flex Medium"/>
+              <a:cs typeface="Google Sans Flex Medium"/>
+              <a:sym typeface="Google Sans Flex Medium"/>
+            </a:endParaRPr>
+          </a:p>
+        </p:txBody>
+      </p:sp>
+    </p:spTree>
+  </p:cSld>
+  <p:clrMapOvr>
+    <a:masterClrMapping/>
+  </p:clrMapOvr>
+</p:sld>
+</file>
+
 <file path=ppt/slides/slide3.xml><?xml version="1.0" encoding="utf-8"?>
 <p:sld xmlns:a="http://schemas.openxmlformats.org/drawingml/2006/main" xmlns:r="http://schemas.openxmlformats.org/officeDocument/2006/relationships" xmlns:mc="http://schemas.openxmlformats.org/markup-compatibility/2006" xmlns:mv="urn:schemas-microsoft-com:mac:vml" xmlns:p="http://schemas.openxmlformats.org/presentationml/2006/main" xmlns:c="http://schemas.openxmlformats.org/drawingml/2006/chart" xmlns:dgm="http://schemas.openxmlformats.org/drawingml/2006/diagram" xmlns:o="urn:schemas-microsoft-com:office:office" xmlns:v="urn:schemas-microsoft-com:vml" xmlns:pvml="urn:schemas-microsoft-com:office:powerpoint" xmlns:com="http://schemas.openxmlformats.org/drawingml/2006/compatibility" xmlns:p14="http://schemas.microsoft.com/office/powerpoint/2010/main" xmlns:p15="http://schemas.microsoft.com/office/powerpoint/2012/main" xmlns:ahyp="http://schemas.microsoft.com/office/drawing/2018/hyperlinkcolor">
   <p:cSld>

--- a/submission/template_extended.pptx
+++ b/submission/template_extended.pptx
@@ -34,6 +34,15 @@
     <p:sldId id="279" r:id="rId35"/>
     <p:sldId id="280" r:id="rId36"/>
     <p:sldId id="281" r:id="rId37"/>
+    <p:sldId id="282" r:id="rId38"/>
+    <p:sldId id="283" r:id="rId39"/>
+    <p:sldId id="284" r:id="rId40"/>
+    <p:sldId id="285" r:id="rId41"/>
+    <p:sldId id="286" r:id="rId42"/>
+    <p:sldId id="287" r:id="rId43"/>
+    <p:sldId id="288" r:id="rId44"/>
+    <p:sldId id="289" r:id="rId45"/>
+    <p:sldId id="290" r:id="rId46"/>
   </p:sldIdLst>
   <p:sldSz cy="5143500" cx="9144000"/>
   <p:notesSz cx="6858000" cy="9144000"/>
@@ -10426,6 +10435,531 @@
 </p:sld>
 </file>
 
+<file path=ppt/slides/slide27.xml><?xml version="1.0" encoding="utf-8"?>
+<p:sld xmlns:a="http://schemas.openxmlformats.org/drawingml/2006/main" xmlns:r="http://schemas.openxmlformats.org/officeDocument/2006/relationships" xmlns:mc="http://schemas.openxmlformats.org/markup-compatibility/2006" xmlns:mv="urn:schemas-microsoft-com:mac:vml" xmlns:p="http://schemas.openxmlformats.org/presentationml/2006/main" xmlns:c="http://schemas.openxmlformats.org/drawingml/2006/chart" xmlns:dgm="http://schemas.openxmlformats.org/drawingml/2006/diagram" xmlns:o="urn:schemas-microsoft-com:office:office" xmlns:v="urn:schemas-microsoft-com:vml" xmlns:pvml="urn:schemas-microsoft-com:office:powerpoint" xmlns:com="http://schemas.openxmlformats.org/drawingml/2006/compatibility" xmlns:p14="http://schemas.microsoft.com/office/powerpoint/2010/main" xmlns:p15="http://schemas.microsoft.com/office/powerpoint/2012/main" xmlns:ahyp="http://schemas.microsoft.com/office/drawing/2018/hyperlinkcolor">
+  <p:cSld>
+    <p:spTree>
+      <p:nvGrpSpPr>
+        <p:cNvPr id="147" name="Shape 147"/>
+        <p:cNvGrpSpPr/>
+        <p:nvPr/>
+      </p:nvGrpSpPr>
+      <p:grpSpPr>
+        <a:xfrm>
+          <a:off x="0" y="0"/>
+          <a:ext cx="0" cy="0"/>
+          <a:chOff x="0" y="0"/>
+          <a:chExt cx="0" cy="0"/>
+        </a:xfrm>
+      </p:grpSpPr>
+      <p:pic>
+        <p:nvPicPr>
+          <p:cNvPr id="148" name="Google Shape;148;p25" title="Frame 144.png"/>
+          <p:cNvPicPr preferRelativeResize="0"/>
+          <p:nvPr/>
+        </p:nvPicPr>
+        <p:blipFill rotWithShape="1">
+          <a:blip r:embed="rId3">
+            <a:alphaModFix/>
+          </a:blip>
+          <a:srcRect b="98001" l="0" r="0" t="0"/>
+          <a:stretch/>
+        </p:blipFill>
+        <p:spPr>
+          <a:xfrm>
+            <a:off x="0" y="5093562"/>
+            <a:ext cx="9144000" cy="54275"/>
+          </a:xfrm>
+          <a:prstGeom prst="rect">
+            <a:avLst/>
+          </a:prstGeom>
+          <a:noFill/>
+          <a:ln>
+            <a:noFill/>
+          </a:ln>
+        </p:spPr>
+      </p:pic>
+      <p:pic>
+        <p:nvPicPr>
+          <p:cNvPr id="149" name="Google Shape;149;p25" title="Group 427319979.png"/>
+          <p:cNvPicPr preferRelativeResize="0"/>
+          <p:nvPr/>
+        </p:nvPicPr>
+        <p:blipFill>
+          <a:blip r:embed="rId4">
+            <a:alphaModFix/>
+          </a:blip>
+          <a:stretch>
+            <a:fillRect/>
+          </a:stretch>
+        </p:blipFill>
+        <p:spPr>
+          <a:xfrm>
+            <a:off x="0" y="1"/>
+            <a:ext cx="9144000" cy="507359"/>
+          </a:xfrm>
+          <a:prstGeom prst="rect">
+            <a:avLst/>
+          </a:prstGeom>
+          <a:noFill/>
+          <a:ln>
+            <a:noFill/>
+          </a:ln>
+        </p:spPr>
+      </p:pic>
+      <p:sp>
+        <p:nvSpPr>
+          <p:cNvPr id="150" name="Google Shape;150;p25"/>
+          <p:cNvSpPr/>
+          <p:nvPr/>
+        </p:nvSpPr>
+        <p:spPr>
+          <a:xfrm>
+            <a:off x="-29250" y="5071875"/>
+            <a:ext cx="9173400" cy="97800"/>
+          </a:xfrm>
+          <a:prstGeom prst="rect">
+            <a:avLst/>
+          </a:prstGeom>
+          <a:solidFill>
+            <a:schemeClr val="dk1"/>
+          </a:solidFill>
+          <a:ln>
+            <a:noFill/>
+          </a:ln>
+        </p:spPr>
+        <p:txBody>
+          <a:bodyPr anchorCtr="0" anchor="ctr" bIns="91425" lIns="91425" spcFirstLastPara="1" rIns="91425" wrap="square" tIns="91425">
+            <a:noAutofit/>
+          </a:bodyPr>
+          <a:lstStyle/>
+          <a:p>
+            <a:pPr indent="0" lvl="0" marL="0" rtl="0" algn="ctr">
+              <a:spcBef>
+                <a:spcPts val="0"/>
+              </a:spcBef>
+              <a:spcAft>
+                <a:spcPts val="0"/>
+              </a:spcAft>
+              <a:buNone/>
+            </a:pPr>
+            <a:r>
+              <a:t/>
+            </a:r>
+            <a:endParaRPr/>
+          </a:p>
+        </p:txBody>
+      </p:sp>
+      <p:sp>
+        <p:nvSpPr>
+          <p:cNvPr id="151" name="Google Shape;151;p25"/>
+          <p:cNvSpPr txBox="1"/>
+          <p:nvPr/>
+        </p:nvSpPr>
+        <p:spPr>
+          <a:xfrm>
+            <a:off x="265350" y="663825"/>
+            <a:ext cx="8943000" cy="561900"/>
+          </a:xfrm>
+          <a:prstGeom prst="rect">
+            <a:avLst/>
+          </a:prstGeom>
+          <a:noFill/>
+          <a:ln>
+            <a:noFill/>
+          </a:ln>
+        </p:spPr>
+        <p:txBody>
+          <a:bodyPr anchorCtr="0" anchor="t" bIns="91425" lIns="91425" spcFirstLastPara="1" rIns="91425" wrap="square" tIns="91425">
+            <a:noAutofit/>
+          </a:bodyPr>
+          <a:lstStyle/>
+          <a:p>
+            <a:pPr indent="0" lvl="0" marL="0" rtl="0" algn="l">
+              <a:spcBef>
+                <a:spcPts val="0"/>
+              </a:spcBef>
+              <a:spcAft>
+                <a:spcPts val="0"/>
+              </a:spcAft>
+              <a:buNone/>
+            </a:pPr>
+            <a:r>
+              <a:rPr lang="en-GB" sz="1600">
+                <a:latin typeface="Google Sans Flex Medium"/>
+                <a:ea typeface="Google Sans Flex Medium"/>
+                <a:cs typeface="Google Sans Flex Medium"/>
+                <a:sym typeface="Google Sans Flex Medium"/>
+              </a:rPr>
+              <a:t>Additional Details/Future Development (if any)</a:t>
+            </a:r>
+            <a:endParaRPr sz="1600">
+              <a:latin typeface="Google Sans Flex Medium"/>
+              <a:ea typeface="Google Sans Flex Medium"/>
+              <a:cs typeface="Google Sans Flex Medium"/>
+              <a:sym typeface="Google Sans Flex Medium"/>
+            </a:endParaRPr>
+          </a:p>
+        </p:txBody>
+      </p:sp>
+    </p:spTree>
+  </p:cSld>
+  <p:clrMapOvr>
+    <a:masterClrMapping/>
+  </p:clrMapOvr>
+</p:sld>
+</file>
+
+<file path=ppt/slides/slide28.xml><?xml version="1.0" encoding="utf-8"?>
+<p:sld xmlns:a="http://schemas.openxmlformats.org/drawingml/2006/main" xmlns:r="http://schemas.openxmlformats.org/officeDocument/2006/relationships" xmlns:mc="http://schemas.openxmlformats.org/markup-compatibility/2006" xmlns:mv="urn:schemas-microsoft-com:mac:vml" xmlns:p="http://schemas.openxmlformats.org/presentationml/2006/main" xmlns:c="http://schemas.openxmlformats.org/drawingml/2006/chart" xmlns:dgm="http://schemas.openxmlformats.org/drawingml/2006/diagram" xmlns:o="urn:schemas-microsoft-com:office:office" xmlns:v="urn:schemas-microsoft-com:vml" xmlns:pvml="urn:schemas-microsoft-com:office:powerpoint" xmlns:com="http://schemas.openxmlformats.org/drawingml/2006/compatibility" xmlns:p14="http://schemas.microsoft.com/office/powerpoint/2010/main" xmlns:p15="http://schemas.microsoft.com/office/powerpoint/2012/main" xmlns:ahyp="http://schemas.microsoft.com/office/drawing/2018/hyperlinkcolor">
+  <p:cSld>
+    <p:spTree>
+      <p:nvGrpSpPr>
+        <p:cNvPr id="147" name="Shape 147"/>
+        <p:cNvGrpSpPr/>
+        <p:nvPr/>
+      </p:nvGrpSpPr>
+      <p:grpSpPr>
+        <a:xfrm>
+          <a:off x="0" y="0"/>
+          <a:ext cx="0" cy="0"/>
+          <a:chOff x="0" y="0"/>
+          <a:chExt cx="0" cy="0"/>
+        </a:xfrm>
+      </p:grpSpPr>
+      <p:pic>
+        <p:nvPicPr>
+          <p:cNvPr id="148" name="Google Shape;148;p25" title="Frame 144.png"/>
+          <p:cNvPicPr preferRelativeResize="0"/>
+          <p:nvPr/>
+        </p:nvPicPr>
+        <p:blipFill rotWithShape="1">
+          <a:blip r:embed="rId3">
+            <a:alphaModFix/>
+          </a:blip>
+          <a:srcRect b="98001" l="0" r="0" t="0"/>
+          <a:stretch/>
+        </p:blipFill>
+        <p:spPr>
+          <a:xfrm>
+            <a:off x="0" y="5093562"/>
+            <a:ext cx="9144000" cy="54275"/>
+          </a:xfrm>
+          <a:prstGeom prst="rect">
+            <a:avLst/>
+          </a:prstGeom>
+          <a:noFill/>
+          <a:ln>
+            <a:noFill/>
+          </a:ln>
+        </p:spPr>
+      </p:pic>
+      <p:pic>
+        <p:nvPicPr>
+          <p:cNvPr id="149" name="Google Shape;149;p25" title="Group 427319979.png"/>
+          <p:cNvPicPr preferRelativeResize="0"/>
+          <p:nvPr/>
+        </p:nvPicPr>
+        <p:blipFill>
+          <a:blip r:embed="rId4">
+            <a:alphaModFix/>
+          </a:blip>
+          <a:stretch>
+            <a:fillRect/>
+          </a:stretch>
+        </p:blipFill>
+        <p:spPr>
+          <a:xfrm>
+            <a:off x="0" y="1"/>
+            <a:ext cx="9144000" cy="507359"/>
+          </a:xfrm>
+          <a:prstGeom prst="rect">
+            <a:avLst/>
+          </a:prstGeom>
+          <a:noFill/>
+          <a:ln>
+            <a:noFill/>
+          </a:ln>
+        </p:spPr>
+      </p:pic>
+      <p:sp>
+        <p:nvSpPr>
+          <p:cNvPr id="150" name="Google Shape;150;p25"/>
+          <p:cNvSpPr/>
+          <p:nvPr/>
+        </p:nvSpPr>
+        <p:spPr>
+          <a:xfrm>
+            <a:off x="-29250" y="5071875"/>
+            <a:ext cx="9173400" cy="97800"/>
+          </a:xfrm>
+          <a:prstGeom prst="rect">
+            <a:avLst/>
+          </a:prstGeom>
+          <a:solidFill>
+            <a:schemeClr val="dk1"/>
+          </a:solidFill>
+          <a:ln>
+            <a:noFill/>
+          </a:ln>
+        </p:spPr>
+        <p:txBody>
+          <a:bodyPr anchorCtr="0" anchor="ctr" bIns="91425" lIns="91425" spcFirstLastPara="1" rIns="91425" wrap="square" tIns="91425">
+            <a:noAutofit/>
+          </a:bodyPr>
+          <a:lstStyle/>
+          <a:p>
+            <a:pPr indent="0" lvl="0" marL="0" rtl="0" algn="ctr">
+              <a:spcBef>
+                <a:spcPts val="0"/>
+              </a:spcBef>
+              <a:spcAft>
+                <a:spcPts val="0"/>
+              </a:spcAft>
+              <a:buNone/>
+            </a:pPr>
+            <a:r>
+              <a:t/>
+            </a:r>
+            <a:endParaRPr/>
+          </a:p>
+        </p:txBody>
+      </p:sp>
+      <p:sp>
+        <p:nvSpPr>
+          <p:cNvPr id="151" name="Google Shape;151;p25"/>
+          <p:cNvSpPr txBox="1"/>
+          <p:nvPr/>
+        </p:nvSpPr>
+        <p:spPr>
+          <a:xfrm>
+            <a:off x="265350" y="663825"/>
+            <a:ext cx="8943000" cy="561900"/>
+          </a:xfrm>
+          <a:prstGeom prst="rect">
+            <a:avLst/>
+          </a:prstGeom>
+          <a:noFill/>
+          <a:ln>
+            <a:noFill/>
+          </a:ln>
+        </p:spPr>
+        <p:txBody>
+          <a:bodyPr anchorCtr="0" anchor="t" bIns="91425" lIns="91425" spcFirstLastPara="1" rIns="91425" wrap="square" tIns="91425">
+            <a:noAutofit/>
+          </a:bodyPr>
+          <a:lstStyle/>
+          <a:p>
+            <a:pPr indent="0" lvl="0" marL="0" rtl="0" algn="l">
+              <a:spcBef>
+                <a:spcPts val="0"/>
+              </a:spcBef>
+              <a:spcAft>
+                <a:spcPts val="0"/>
+              </a:spcAft>
+              <a:buNone/>
+            </a:pPr>
+            <a:r>
+              <a:rPr lang="en-GB" sz="1600">
+                <a:latin typeface="Google Sans Flex Medium"/>
+                <a:ea typeface="Google Sans Flex Medium"/>
+                <a:cs typeface="Google Sans Flex Medium"/>
+                <a:sym typeface="Google Sans Flex Medium"/>
+              </a:rPr>
+              <a:t>Additional Details/Future Development (if any)</a:t>
+            </a:r>
+            <a:endParaRPr sz="1600">
+              <a:latin typeface="Google Sans Flex Medium"/>
+              <a:ea typeface="Google Sans Flex Medium"/>
+              <a:cs typeface="Google Sans Flex Medium"/>
+              <a:sym typeface="Google Sans Flex Medium"/>
+            </a:endParaRPr>
+          </a:p>
+        </p:txBody>
+      </p:sp>
+    </p:spTree>
+  </p:cSld>
+  <p:clrMapOvr>
+    <a:masterClrMapping/>
+  </p:clrMapOvr>
+</p:sld>
+</file>
+
+<file path=ppt/slides/slide29.xml><?xml version="1.0" encoding="utf-8"?>
+<p:sld xmlns:a="http://schemas.openxmlformats.org/drawingml/2006/main" xmlns:r="http://schemas.openxmlformats.org/officeDocument/2006/relationships" xmlns:mc="http://schemas.openxmlformats.org/markup-compatibility/2006" xmlns:mv="urn:schemas-microsoft-com:mac:vml" xmlns:p="http://schemas.openxmlformats.org/presentationml/2006/main" xmlns:c="http://schemas.openxmlformats.org/drawingml/2006/chart" xmlns:dgm="http://schemas.openxmlformats.org/drawingml/2006/diagram" xmlns:o="urn:schemas-microsoft-com:office:office" xmlns:v="urn:schemas-microsoft-com:vml" xmlns:pvml="urn:schemas-microsoft-com:office:powerpoint" xmlns:com="http://schemas.openxmlformats.org/drawingml/2006/compatibility" xmlns:p14="http://schemas.microsoft.com/office/powerpoint/2010/main" xmlns:p15="http://schemas.microsoft.com/office/powerpoint/2012/main" xmlns:ahyp="http://schemas.microsoft.com/office/drawing/2018/hyperlinkcolor">
+  <p:cSld>
+    <p:spTree>
+      <p:nvGrpSpPr>
+        <p:cNvPr id="147" name="Shape 147"/>
+        <p:cNvGrpSpPr/>
+        <p:nvPr/>
+      </p:nvGrpSpPr>
+      <p:grpSpPr>
+        <a:xfrm>
+          <a:off x="0" y="0"/>
+          <a:ext cx="0" cy="0"/>
+          <a:chOff x="0" y="0"/>
+          <a:chExt cx="0" cy="0"/>
+        </a:xfrm>
+      </p:grpSpPr>
+      <p:pic>
+        <p:nvPicPr>
+          <p:cNvPr id="148" name="Google Shape;148;p25" title="Frame 144.png"/>
+          <p:cNvPicPr preferRelativeResize="0"/>
+          <p:nvPr/>
+        </p:nvPicPr>
+        <p:blipFill rotWithShape="1">
+          <a:blip r:embed="rId3">
+            <a:alphaModFix/>
+          </a:blip>
+          <a:srcRect b="98001" l="0" r="0" t="0"/>
+          <a:stretch/>
+        </p:blipFill>
+        <p:spPr>
+          <a:xfrm>
+            <a:off x="0" y="5093562"/>
+            <a:ext cx="9144000" cy="54275"/>
+          </a:xfrm>
+          <a:prstGeom prst="rect">
+            <a:avLst/>
+          </a:prstGeom>
+          <a:noFill/>
+          <a:ln>
+            <a:noFill/>
+          </a:ln>
+        </p:spPr>
+      </p:pic>
+      <p:pic>
+        <p:nvPicPr>
+          <p:cNvPr id="149" name="Google Shape;149;p25" title="Group 427319979.png"/>
+          <p:cNvPicPr preferRelativeResize="0"/>
+          <p:nvPr/>
+        </p:nvPicPr>
+        <p:blipFill>
+          <a:blip r:embed="rId4">
+            <a:alphaModFix/>
+          </a:blip>
+          <a:stretch>
+            <a:fillRect/>
+          </a:stretch>
+        </p:blipFill>
+        <p:spPr>
+          <a:xfrm>
+            <a:off x="0" y="1"/>
+            <a:ext cx="9144000" cy="507359"/>
+          </a:xfrm>
+          <a:prstGeom prst="rect">
+            <a:avLst/>
+          </a:prstGeom>
+          <a:noFill/>
+          <a:ln>
+            <a:noFill/>
+          </a:ln>
+        </p:spPr>
+      </p:pic>
+      <p:sp>
+        <p:nvSpPr>
+          <p:cNvPr id="150" name="Google Shape;150;p25"/>
+          <p:cNvSpPr/>
+          <p:nvPr/>
+        </p:nvSpPr>
+        <p:spPr>
+          <a:xfrm>
+            <a:off x="-29250" y="5071875"/>
+            <a:ext cx="9173400" cy="97800"/>
+          </a:xfrm>
+          <a:prstGeom prst="rect">
+            <a:avLst/>
+          </a:prstGeom>
+          <a:solidFill>
+            <a:schemeClr val="dk1"/>
+          </a:solidFill>
+          <a:ln>
+            <a:noFill/>
+          </a:ln>
+        </p:spPr>
+        <p:txBody>
+          <a:bodyPr anchorCtr="0" anchor="ctr" bIns="91425" lIns="91425" spcFirstLastPara="1" rIns="91425" wrap="square" tIns="91425">
+            <a:noAutofit/>
+          </a:bodyPr>
+          <a:lstStyle/>
+          <a:p>
+            <a:pPr indent="0" lvl="0" marL="0" rtl="0" algn="ctr">
+              <a:spcBef>
+                <a:spcPts val="0"/>
+              </a:spcBef>
+              <a:spcAft>
+                <a:spcPts val="0"/>
+              </a:spcAft>
+              <a:buNone/>
+            </a:pPr>
+            <a:r>
+              <a:t/>
+            </a:r>
+            <a:endParaRPr/>
+          </a:p>
+        </p:txBody>
+      </p:sp>
+      <p:sp>
+        <p:nvSpPr>
+          <p:cNvPr id="151" name="Google Shape;151;p25"/>
+          <p:cNvSpPr txBox="1"/>
+          <p:nvPr/>
+        </p:nvSpPr>
+        <p:spPr>
+          <a:xfrm>
+            <a:off x="265350" y="663825"/>
+            <a:ext cx="8943000" cy="561900"/>
+          </a:xfrm>
+          <a:prstGeom prst="rect">
+            <a:avLst/>
+          </a:prstGeom>
+          <a:noFill/>
+          <a:ln>
+            <a:noFill/>
+          </a:ln>
+        </p:spPr>
+        <p:txBody>
+          <a:bodyPr anchorCtr="0" anchor="t" bIns="91425" lIns="91425" spcFirstLastPara="1" rIns="91425" wrap="square" tIns="91425">
+            <a:noAutofit/>
+          </a:bodyPr>
+          <a:lstStyle/>
+          <a:p>
+            <a:pPr indent="0" lvl="0" marL="0" rtl="0" algn="l">
+              <a:spcBef>
+                <a:spcPts val="0"/>
+              </a:spcBef>
+              <a:spcAft>
+                <a:spcPts val="0"/>
+              </a:spcAft>
+              <a:buNone/>
+            </a:pPr>
+            <a:r>
+              <a:rPr lang="en-GB" sz="1600">
+                <a:latin typeface="Google Sans Flex Medium"/>
+                <a:ea typeface="Google Sans Flex Medium"/>
+                <a:cs typeface="Google Sans Flex Medium"/>
+                <a:sym typeface="Google Sans Flex Medium"/>
+              </a:rPr>
+              <a:t>Additional Details/Future Development (if any)</a:t>
+            </a:r>
+            <a:endParaRPr sz="1600">
+              <a:latin typeface="Google Sans Flex Medium"/>
+              <a:ea typeface="Google Sans Flex Medium"/>
+              <a:cs typeface="Google Sans Flex Medium"/>
+              <a:sym typeface="Google Sans Flex Medium"/>
+            </a:endParaRPr>
+          </a:p>
+        </p:txBody>
+      </p:sp>
+    </p:spTree>
+  </p:cSld>
+  <p:clrMapOvr>
+    <a:masterClrMapping/>
+  </p:clrMapOvr>
+</p:sld>
+</file>
+
 <file path=ppt/slides/slide3.xml><?xml version="1.0" encoding="utf-8"?>
 <p:sld xmlns:a="http://schemas.openxmlformats.org/drawingml/2006/main" xmlns:r="http://schemas.openxmlformats.org/officeDocument/2006/relationships" xmlns:mc="http://schemas.openxmlformats.org/markup-compatibility/2006" xmlns:mv="urn:schemas-microsoft-com:mac:vml" xmlns:p="http://schemas.openxmlformats.org/presentationml/2006/main" xmlns:c="http://schemas.openxmlformats.org/drawingml/2006/chart" xmlns:dgm="http://schemas.openxmlformats.org/drawingml/2006/diagram" xmlns:o="urn:schemas-microsoft-com:office:office" xmlns:v="urn:schemas-microsoft-com:vml" xmlns:pvml="urn:schemas-microsoft-com:office:powerpoint" xmlns:com="http://schemas.openxmlformats.org/drawingml/2006/compatibility" xmlns:p14="http://schemas.microsoft.com/office/powerpoint/2010/main" xmlns:p15="http://schemas.microsoft.com/office/powerpoint/2012/main" xmlns:ahyp="http://schemas.microsoft.com/office/drawing/2018/hyperlinkcolor">
   <p:cSld>
@@ -10556,6 +11090,1056 @@
                 <a:sym typeface="Google Sans Flex Medium"/>
               </a:rPr>
               <a:t>Brief about the idea</a:t>
+            </a:r>
+            <a:endParaRPr sz="1600">
+              <a:latin typeface="Google Sans Flex Medium"/>
+              <a:ea typeface="Google Sans Flex Medium"/>
+              <a:cs typeface="Google Sans Flex Medium"/>
+              <a:sym typeface="Google Sans Flex Medium"/>
+            </a:endParaRPr>
+          </a:p>
+        </p:txBody>
+      </p:sp>
+    </p:spTree>
+  </p:cSld>
+  <p:clrMapOvr>
+    <a:masterClrMapping/>
+  </p:clrMapOvr>
+</p:sld>
+</file>
+
+<file path=ppt/slides/slide30.xml><?xml version="1.0" encoding="utf-8"?>
+<p:sld xmlns:a="http://schemas.openxmlformats.org/drawingml/2006/main" xmlns:r="http://schemas.openxmlformats.org/officeDocument/2006/relationships" xmlns:mc="http://schemas.openxmlformats.org/markup-compatibility/2006" xmlns:mv="urn:schemas-microsoft-com:mac:vml" xmlns:p="http://schemas.openxmlformats.org/presentationml/2006/main" xmlns:c="http://schemas.openxmlformats.org/drawingml/2006/chart" xmlns:dgm="http://schemas.openxmlformats.org/drawingml/2006/diagram" xmlns:o="urn:schemas-microsoft-com:office:office" xmlns:v="urn:schemas-microsoft-com:vml" xmlns:pvml="urn:schemas-microsoft-com:office:powerpoint" xmlns:com="http://schemas.openxmlformats.org/drawingml/2006/compatibility" xmlns:p14="http://schemas.microsoft.com/office/powerpoint/2010/main" xmlns:p15="http://schemas.microsoft.com/office/powerpoint/2012/main" xmlns:ahyp="http://schemas.microsoft.com/office/drawing/2018/hyperlinkcolor">
+  <p:cSld>
+    <p:spTree>
+      <p:nvGrpSpPr>
+        <p:cNvPr id="147" name="Shape 147"/>
+        <p:cNvGrpSpPr/>
+        <p:nvPr/>
+      </p:nvGrpSpPr>
+      <p:grpSpPr>
+        <a:xfrm>
+          <a:off x="0" y="0"/>
+          <a:ext cx="0" cy="0"/>
+          <a:chOff x="0" y="0"/>
+          <a:chExt cx="0" cy="0"/>
+        </a:xfrm>
+      </p:grpSpPr>
+      <p:pic>
+        <p:nvPicPr>
+          <p:cNvPr id="148" name="Google Shape;148;p25" title="Frame 144.png"/>
+          <p:cNvPicPr preferRelativeResize="0"/>
+          <p:nvPr/>
+        </p:nvPicPr>
+        <p:blipFill rotWithShape="1">
+          <a:blip r:embed="rId3">
+            <a:alphaModFix/>
+          </a:blip>
+          <a:srcRect b="98001" l="0" r="0" t="0"/>
+          <a:stretch/>
+        </p:blipFill>
+        <p:spPr>
+          <a:xfrm>
+            <a:off x="0" y="5093562"/>
+            <a:ext cx="9144000" cy="54275"/>
+          </a:xfrm>
+          <a:prstGeom prst="rect">
+            <a:avLst/>
+          </a:prstGeom>
+          <a:noFill/>
+          <a:ln>
+            <a:noFill/>
+          </a:ln>
+        </p:spPr>
+      </p:pic>
+      <p:pic>
+        <p:nvPicPr>
+          <p:cNvPr id="149" name="Google Shape;149;p25" title="Group 427319979.png"/>
+          <p:cNvPicPr preferRelativeResize="0"/>
+          <p:nvPr/>
+        </p:nvPicPr>
+        <p:blipFill>
+          <a:blip r:embed="rId4">
+            <a:alphaModFix/>
+          </a:blip>
+          <a:stretch>
+            <a:fillRect/>
+          </a:stretch>
+        </p:blipFill>
+        <p:spPr>
+          <a:xfrm>
+            <a:off x="0" y="1"/>
+            <a:ext cx="9144000" cy="507359"/>
+          </a:xfrm>
+          <a:prstGeom prst="rect">
+            <a:avLst/>
+          </a:prstGeom>
+          <a:noFill/>
+          <a:ln>
+            <a:noFill/>
+          </a:ln>
+        </p:spPr>
+      </p:pic>
+      <p:sp>
+        <p:nvSpPr>
+          <p:cNvPr id="150" name="Google Shape;150;p25"/>
+          <p:cNvSpPr/>
+          <p:nvPr/>
+        </p:nvSpPr>
+        <p:spPr>
+          <a:xfrm>
+            <a:off x="-29250" y="5071875"/>
+            <a:ext cx="9173400" cy="97800"/>
+          </a:xfrm>
+          <a:prstGeom prst="rect">
+            <a:avLst/>
+          </a:prstGeom>
+          <a:solidFill>
+            <a:schemeClr val="dk1"/>
+          </a:solidFill>
+          <a:ln>
+            <a:noFill/>
+          </a:ln>
+        </p:spPr>
+        <p:txBody>
+          <a:bodyPr anchorCtr="0" anchor="ctr" bIns="91425" lIns="91425" spcFirstLastPara="1" rIns="91425" wrap="square" tIns="91425">
+            <a:noAutofit/>
+          </a:bodyPr>
+          <a:lstStyle/>
+          <a:p>
+            <a:pPr indent="0" lvl="0" marL="0" rtl="0" algn="ctr">
+              <a:spcBef>
+                <a:spcPts val="0"/>
+              </a:spcBef>
+              <a:spcAft>
+                <a:spcPts val="0"/>
+              </a:spcAft>
+              <a:buNone/>
+            </a:pPr>
+            <a:r>
+              <a:t/>
+            </a:r>
+            <a:endParaRPr/>
+          </a:p>
+        </p:txBody>
+      </p:sp>
+      <p:sp>
+        <p:nvSpPr>
+          <p:cNvPr id="151" name="Google Shape;151;p25"/>
+          <p:cNvSpPr txBox="1"/>
+          <p:nvPr/>
+        </p:nvSpPr>
+        <p:spPr>
+          <a:xfrm>
+            <a:off x="265350" y="663825"/>
+            <a:ext cx="8943000" cy="561900"/>
+          </a:xfrm>
+          <a:prstGeom prst="rect">
+            <a:avLst/>
+          </a:prstGeom>
+          <a:noFill/>
+          <a:ln>
+            <a:noFill/>
+          </a:ln>
+        </p:spPr>
+        <p:txBody>
+          <a:bodyPr anchorCtr="0" anchor="t" bIns="91425" lIns="91425" spcFirstLastPara="1" rIns="91425" wrap="square" tIns="91425">
+            <a:noAutofit/>
+          </a:bodyPr>
+          <a:lstStyle/>
+          <a:p>
+            <a:pPr indent="0" lvl="0" marL="0" rtl="0" algn="l">
+              <a:spcBef>
+                <a:spcPts val="0"/>
+              </a:spcBef>
+              <a:spcAft>
+                <a:spcPts val="0"/>
+              </a:spcAft>
+              <a:buNone/>
+            </a:pPr>
+            <a:r>
+              <a:rPr lang="en-GB" sz="1600">
+                <a:latin typeface="Google Sans Flex Medium"/>
+                <a:ea typeface="Google Sans Flex Medium"/>
+                <a:cs typeface="Google Sans Flex Medium"/>
+                <a:sym typeface="Google Sans Flex Medium"/>
+              </a:rPr>
+              <a:t>Additional Details/Future Development (if any)</a:t>
+            </a:r>
+            <a:endParaRPr sz="1600">
+              <a:latin typeface="Google Sans Flex Medium"/>
+              <a:ea typeface="Google Sans Flex Medium"/>
+              <a:cs typeface="Google Sans Flex Medium"/>
+              <a:sym typeface="Google Sans Flex Medium"/>
+            </a:endParaRPr>
+          </a:p>
+        </p:txBody>
+      </p:sp>
+    </p:spTree>
+  </p:cSld>
+  <p:clrMapOvr>
+    <a:masterClrMapping/>
+  </p:clrMapOvr>
+</p:sld>
+</file>
+
+<file path=ppt/slides/slide31.xml><?xml version="1.0" encoding="utf-8"?>
+<p:sld xmlns:a="http://schemas.openxmlformats.org/drawingml/2006/main" xmlns:r="http://schemas.openxmlformats.org/officeDocument/2006/relationships" xmlns:mc="http://schemas.openxmlformats.org/markup-compatibility/2006" xmlns:mv="urn:schemas-microsoft-com:mac:vml" xmlns:p="http://schemas.openxmlformats.org/presentationml/2006/main" xmlns:c="http://schemas.openxmlformats.org/drawingml/2006/chart" xmlns:dgm="http://schemas.openxmlformats.org/drawingml/2006/diagram" xmlns:o="urn:schemas-microsoft-com:office:office" xmlns:v="urn:schemas-microsoft-com:vml" xmlns:pvml="urn:schemas-microsoft-com:office:powerpoint" xmlns:com="http://schemas.openxmlformats.org/drawingml/2006/compatibility" xmlns:p14="http://schemas.microsoft.com/office/powerpoint/2010/main" xmlns:p15="http://schemas.microsoft.com/office/powerpoint/2012/main" xmlns:ahyp="http://schemas.microsoft.com/office/drawing/2018/hyperlinkcolor">
+  <p:cSld>
+    <p:spTree>
+      <p:nvGrpSpPr>
+        <p:cNvPr id="147" name="Shape 147"/>
+        <p:cNvGrpSpPr/>
+        <p:nvPr/>
+      </p:nvGrpSpPr>
+      <p:grpSpPr>
+        <a:xfrm>
+          <a:off x="0" y="0"/>
+          <a:ext cx="0" cy="0"/>
+          <a:chOff x="0" y="0"/>
+          <a:chExt cx="0" cy="0"/>
+        </a:xfrm>
+      </p:grpSpPr>
+      <p:pic>
+        <p:nvPicPr>
+          <p:cNvPr id="148" name="Google Shape;148;p25" title="Frame 144.png"/>
+          <p:cNvPicPr preferRelativeResize="0"/>
+          <p:nvPr/>
+        </p:nvPicPr>
+        <p:blipFill rotWithShape="1">
+          <a:blip r:embed="rId3">
+            <a:alphaModFix/>
+          </a:blip>
+          <a:srcRect b="98001" l="0" r="0" t="0"/>
+          <a:stretch/>
+        </p:blipFill>
+        <p:spPr>
+          <a:xfrm>
+            <a:off x="0" y="5093562"/>
+            <a:ext cx="9144000" cy="54275"/>
+          </a:xfrm>
+          <a:prstGeom prst="rect">
+            <a:avLst/>
+          </a:prstGeom>
+          <a:noFill/>
+          <a:ln>
+            <a:noFill/>
+          </a:ln>
+        </p:spPr>
+      </p:pic>
+      <p:pic>
+        <p:nvPicPr>
+          <p:cNvPr id="149" name="Google Shape;149;p25" title="Group 427319979.png"/>
+          <p:cNvPicPr preferRelativeResize="0"/>
+          <p:nvPr/>
+        </p:nvPicPr>
+        <p:blipFill>
+          <a:blip r:embed="rId4">
+            <a:alphaModFix/>
+          </a:blip>
+          <a:stretch>
+            <a:fillRect/>
+          </a:stretch>
+        </p:blipFill>
+        <p:spPr>
+          <a:xfrm>
+            <a:off x="0" y="1"/>
+            <a:ext cx="9144000" cy="507359"/>
+          </a:xfrm>
+          <a:prstGeom prst="rect">
+            <a:avLst/>
+          </a:prstGeom>
+          <a:noFill/>
+          <a:ln>
+            <a:noFill/>
+          </a:ln>
+        </p:spPr>
+      </p:pic>
+      <p:sp>
+        <p:nvSpPr>
+          <p:cNvPr id="150" name="Google Shape;150;p25"/>
+          <p:cNvSpPr/>
+          <p:nvPr/>
+        </p:nvSpPr>
+        <p:spPr>
+          <a:xfrm>
+            <a:off x="-29250" y="5071875"/>
+            <a:ext cx="9173400" cy="97800"/>
+          </a:xfrm>
+          <a:prstGeom prst="rect">
+            <a:avLst/>
+          </a:prstGeom>
+          <a:solidFill>
+            <a:schemeClr val="dk1"/>
+          </a:solidFill>
+          <a:ln>
+            <a:noFill/>
+          </a:ln>
+        </p:spPr>
+        <p:txBody>
+          <a:bodyPr anchorCtr="0" anchor="ctr" bIns="91425" lIns="91425" spcFirstLastPara="1" rIns="91425" wrap="square" tIns="91425">
+            <a:noAutofit/>
+          </a:bodyPr>
+          <a:lstStyle/>
+          <a:p>
+            <a:pPr indent="0" lvl="0" marL="0" rtl="0" algn="ctr">
+              <a:spcBef>
+                <a:spcPts val="0"/>
+              </a:spcBef>
+              <a:spcAft>
+                <a:spcPts val="0"/>
+              </a:spcAft>
+              <a:buNone/>
+            </a:pPr>
+            <a:r>
+              <a:t/>
+            </a:r>
+            <a:endParaRPr/>
+          </a:p>
+        </p:txBody>
+      </p:sp>
+      <p:sp>
+        <p:nvSpPr>
+          <p:cNvPr id="151" name="Google Shape;151;p25"/>
+          <p:cNvSpPr txBox="1"/>
+          <p:nvPr/>
+        </p:nvSpPr>
+        <p:spPr>
+          <a:xfrm>
+            <a:off x="265350" y="663825"/>
+            <a:ext cx="8943000" cy="561900"/>
+          </a:xfrm>
+          <a:prstGeom prst="rect">
+            <a:avLst/>
+          </a:prstGeom>
+          <a:noFill/>
+          <a:ln>
+            <a:noFill/>
+          </a:ln>
+        </p:spPr>
+        <p:txBody>
+          <a:bodyPr anchorCtr="0" anchor="t" bIns="91425" lIns="91425" spcFirstLastPara="1" rIns="91425" wrap="square" tIns="91425">
+            <a:noAutofit/>
+          </a:bodyPr>
+          <a:lstStyle/>
+          <a:p>
+            <a:pPr indent="0" lvl="0" marL="0" rtl="0" algn="l">
+              <a:spcBef>
+                <a:spcPts val="0"/>
+              </a:spcBef>
+              <a:spcAft>
+                <a:spcPts val="0"/>
+              </a:spcAft>
+              <a:buNone/>
+            </a:pPr>
+            <a:r>
+              <a:rPr lang="en-GB" sz="1600">
+                <a:latin typeface="Google Sans Flex Medium"/>
+                <a:ea typeface="Google Sans Flex Medium"/>
+                <a:cs typeface="Google Sans Flex Medium"/>
+                <a:sym typeface="Google Sans Flex Medium"/>
+              </a:rPr>
+              <a:t>Additional Details/Future Development (if any)</a:t>
+            </a:r>
+            <a:endParaRPr sz="1600">
+              <a:latin typeface="Google Sans Flex Medium"/>
+              <a:ea typeface="Google Sans Flex Medium"/>
+              <a:cs typeface="Google Sans Flex Medium"/>
+              <a:sym typeface="Google Sans Flex Medium"/>
+            </a:endParaRPr>
+          </a:p>
+        </p:txBody>
+      </p:sp>
+    </p:spTree>
+  </p:cSld>
+  <p:clrMapOvr>
+    <a:masterClrMapping/>
+  </p:clrMapOvr>
+</p:sld>
+</file>
+
+<file path=ppt/slides/slide32.xml><?xml version="1.0" encoding="utf-8"?>
+<p:sld xmlns:a="http://schemas.openxmlformats.org/drawingml/2006/main" xmlns:r="http://schemas.openxmlformats.org/officeDocument/2006/relationships" xmlns:mc="http://schemas.openxmlformats.org/markup-compatibility/2006" xmlns:mv="urn:schemas-microsoft-com:mac:vml" xmlns:p="http://schemas.openxmlformats.org/presentationml/2006/main" xmlns:c="http://schemas.openxmlformats.org/drawingml/2006/chart" xmlns:dgm="http://schemas.openxmlformats.org/drawingml/2006/diagram" xmlns:o="urn:schemas-microsoft-com:office:office" xmlns:v="urn:schemas-microsoft-com:vml" xmlns:pvml="urn:schemas-microsoft-com:office:powerpoint" xmlns:com="http://schemas.openxmlformats.org/drawingml/2006/compatibility" xmlns:p14="http://schemas.microsoft.com/office/powerpoint/2010/main" xmlns:p15="http://schemas.microsoft.com/office/powerpoint/2012/main" xmlns:ahyp="http://schemas.microsoft.com/office/drawing/2018/hyperlinkcolor">
+  <p:cSld>
+    <p:spTree>
+      <p:nvGrpSpPr>
+        <p:cNvPr id="147" name="Shape 147"/>
+        <p:cNvGrpSpPr/>
+        <p:nvPr/>
+      </p:nvGrpSpPr>
+      <p:grpSpPr>
+        <a:xfrm>
+          <a:off x="0" y="0"/>
+          <a:ext cx="0" cy="0"/>
+          <a:chOff x="0" y="0"/>
+          <a:chExt cx="0" cy="0"/>
+        </a:xfrm>
+      </p:grpSpPr>
+      <p:pic>
+        <p:nvPicPr>
+          <p:cNvPr id="148" name="Google Shape;148;p25" title="Frame 144.png"/>
+          <p:cNvPicPr preferRelativeResize="0"/>
+          <p:nvPr/>
+        </p:nvPicPr>
+        <p:blipFill rotWithShape="1">
+          <a:blip r:embed="rId3">
+            <a:alphaModFix/>
+          </a:blip>
+          <a:srcRect b="98001" l="0" r="0" t="0"/>
+          <a:stretch/>
+        </p:blipFill>
+        <p:spPr>
+          <a:xfrm>
+            <a:off x="0" y="5093562"/>
+            <a:ext cx="9144000" cy="54275"/>
+          </a:xfrm>
+          <a:prstGeom prst="rect">
+            <a:avLst/>
+          </a:prstGeom>
+          <a:noFill/>
+          <a:ln>
+            <a:noFill/>
+          </a:ln>
+        </p:spPr>
+      </p:pic>
+      <p:pic>
+        <p:nvPicPr>
+          <p:cNvPr id="149" name="Google Shape;149;p25" title="Group 427319979.png"/>
+          <p:cNvPicPr preferRelativeResize="0"/>
+          <p:nvPr/>
+        </p:nvPicPr>
+        <p:blipFill>
+          <a:blip r:embed="rId4">
+            <a:alphaModFix/>
+          </a:blip>
+          <a:stretch>
+            <a:fillRect/>
+          </a:stretch>
+        </p:blipFill>
+        <p:spPr>
+          <a:xfrm>
+            <a:off x="0" y="1"/>
+            <a:ext cx="9144000" cy="507359"/>
+          </a:xfrm>
+          <a:prstGeom prst="rect">
+            <a:avLst/>
+          </a:prstGeom>
+          <a:noFill/>
+          <a:ln>
+            <a:noFill/>
+          </a:ln>
+        </p:spPr>
+      </p:pic>
+      <p:sp>
+        <p:nvSpPr>
+          <p:cNvPr id="150" name="Google Shape;150;p25"/>
+          <p:cNvSpPr/>
+          <p:nvPr/>
+        </p:nvSpPr>
+        <p:spPr>
+          <a:xfrm>
+            <a:off x="-29250" y="5071875"/>
+            <a:ext cx="9173400" cy="97800"/>
+          </a:xfrm>
+          <a:prstGeom prst="rect">
+            <a:avLst/>
+          </a:prstGeom>
+          <a:solidFill>
+            <a:schemeClr val="dk1"/>
+          </a:solidFill>
+          <a:ln>
+            <a:noFill/>
+          </a:ln>
+        </p:spPr>
+        <p:txBody>
+          <a:bodyPr anchorCtr="0" anchor="ctr" bIns="91425" lIns="91425" spcFirstLastPara="1" rIns="91425" wrap="square" tIns="91425">
+            <a:noAutofit/>
+          </a:bodyPr>
+          <a:lstStyle/>
+          <a:p>
+            <a:pPr indent="0" lvl="0" marL="0" rtl="0" algn="ctr">
+              <a:spcBef>
+                <a:spcPts val="0"/>
+              </a:spcBef>
+              <a:spcAft>
+                <a:spcPts val="0"/>
+              </a:spcAft>
+              <a:buNone/>
+            </a:pPr>
+            <a:r>
+              <a:t/>
+            </a:r>
+            <a:endParaRPr/>
+          </a:p>
+        </p:txBody>
+      </p:sp>
+      <p:sp>
+        <p:nvSpPr>
+          <p:cNvPr id="151" name="Google Shape;151;p25"/>
+          <p:cNvSpPr txBox="1"/>
+          <p:nvPr/>
+        </p:nvSpPr>
+        <p:spPr>
+          <a:xfrm>
+            <a:off x="265350" y="663825"/>
+            <a:ext cx="8943000" cy="561900"/>
+          </a:xfrm>
+          <a:prstGeom prst="rect">
+            <a:avLst/>
+          </a:prstGeom>
+          <a:noFill/>
+          <a:ln>
+            <a:noFill/>
+          </a:ln>
+        </p:spPr>
+        <p:txBody>
+          <a:bodyPr anchorCtr="0" anchor="t" bIns="91425" lIns="91425" spcFirstLastPara="1" rIns="91425" wrap="square" tIns="91425">
+            <a:noAutofit/>
+          </a:bodyPr>
+          <a:lstStyle/>
+          <a:p>
+            <a:pPr indent="0" lvl="0" marL="0" rtl="0" algn="l">
+              <a:spcBef>
+                <a:spcPts val="0"/>
+              </a:spcBef>
+              <a:spcAft>
+                <a:spcPts val="0"/>
+              </a:spcAft>
+              <a:buNone/>
+            </a:pPr>
+            <a:r>
+              <a:rPr lang="en-GB" sz="1600">
+                <a:latin typeface="Google Sans Flex Medium"/>
+                <a:ea typeface="Google Sans Flex Medium"/>
+                <a:cs typeface="Google Sans Flex Medium"/>
+                <a:sym typeface="Google Sans Flex Medium"/>
+              </a:rPr>
+              <a:t>Additional Details/Future Development (if any)</a:t>
+            </a:r>
+            <a:endParaRPr sz="1600">
+              <a:latin typeface="Google Sans Flex Medium"/>
+              <a:ea typeface="Google Sans Flex Medium"/>
+              <a:cs typeface="Google Sans Flex Medium"/>
+              <a:sym typeface="Google Sans Flex Medium"/>
+            </a:endParaRPr>
+          </a:p>
+        </p:txBody>
+      </p:sp>
+    </p:spTree>
+  </p:cSld>
+  <p:clrMapOvr>
+    <a:masterClrMapping/>
+  </p:clrMapOvr>
+</p:sld>
+</file>
+
+<file path=ppt/slides/slide33.xml><?xml version="1.0" encoding="utf-8"?>
+<p:sld xmlns:a="http://schemas.openxmlformats.org/drawingml/2006/main" xmlns:r="http://schemas.openxmlformats.org/officeDocument/2006/relationships" xmlns:mc="http://schemas.openxmlformats.org/markup-compatibility/2006" xmlns:mv="urn:schemas-microsoft-com:mac:vml" xmlns:p="http://schemas.openxmlformats.org/presentationml/2006/main" xmlns:c="http://schemas.openxmlformats.org/drawingml/2006/chart" xmlns:dgm="http://schemas.openxmlformats.org/drawingml/2006/diagram" xmlns:o="urn:schemas-microsoft-com:office:office" xmlns:v="urn:schemas-microsoft-com:vml" xmlns:pvml="urn:schemas-microsoft-com:office:powerpoint" xmlns:com="http://schemas.openxmlformats.org/drawingml/2006/compatibility" xmlns:p14="http://schemas.microsoft.com/office/powerpoint/2010/main" xmlns:p15="http://schemas.microsoft.com/office/powerpoint/2012/main" xmlns:ahyp="http://schemas.microsoft.com/office/drawing/2018/hyperlinkcolor">
+  <p:cSld>
+    <p:spTree>
+      <p:nvGrpSpPr>
+        <p:cNvPr id="147" name="Shape 147"/>
+        <p:cNvGrpSpPr/>
+        <p:nvPr/>
+      </p:nvGrpSpPr>
+      <p:grpSpPr>
+        <a:xfrm>
+          <a:off x="0" y="0"/>
+          <a:ext cx="0" cy="0"/>
+          <a:chOff x="0" y="0"/>
+          <a:chExt cx="0" cy="0"/>
+        </a:xfrm>
+      </p:grpSpPr>
+      <p:pic>
+        <p:nvPicPr>
+          <p:cNvPr id="148" name="Google Shape;148;p25" title="Frame 144.png"/>
+          <p:cNvPicPr preferRelativeResize="0"/>
+          <p:nvPr/>
+        </p:nvPicPr>
+        <p:blipFill rotWithShape="1">
+          <a:blip r:embed="rId3">
+            <a:alphaModFix/>
+          </a:blip>
+          <a:srcRect b="98001" l="0" r="0" t="0"/>
+          <a:stretch/>
+        </p:blipFill>
+        <p:spPr>
+          <a:xfrm>
+            <a:off x="0" y="5093562"/>
+            <a:ext cx="9144000" cy="54275"/>
+          </a:xfrm>
+          <a:prstGeom prst="rect">
+            <a:avLst/>
+          </a:prstGeom>
+          <a:noFill/>
+          <a:ln>
+            <a:noFill/>
+          </a:ln>
+        </p:spPr>
+      </p:pic>
+      <p:pic>
+        <p:nvPicPr>
+          <p:cNvPr id="149" name="Google Shape;149;p25" title="Group 427319979.png"/>
+          <p:cNvPicPr preferRelativeResize="0"/>
+          <p:nvPr/>
+        </p:nvPicPr>
+        <p:blipFill>
+          <a:blip r:embed="rId4">
+            <a:alphaModFix/>
+          </a:blip>
+          <a:stretch>
+            <a:fillRect/>
+          </a:stretch>
+        </p:blipFill>
+        <p:spPr>
+          <a:xfrm>
+            <a:off x="0" y="1"/>
+            <a:ext cx="9144000" cy="507359"/>
+          </a:xfrm>
+          <a:prstGeom prst="rect">
+            <a:avLst/>
+          </a:prstGeom>
+          <a:noFill/>
+          <a:ln>
+            <a:noFill/>
+          </a:ln>
+        </p:spPr>
+      </p:pic>
+      <p:sp>
+        <p:nvSpPr>
+          <p:cNvPr id="150" name="Google Shape;150;p25"/>
+          <p:cNvSpPr/>
+          <p:nvPr/>
+        </p:nvSpPr>
+        <p:spPr>
+          <a:xfrm>
+            <a:off x="-29250" y="5071875"/>
+            <a:ext cx="9173400" cy="97800"/>
+          </a:xfrm>
+          <a:prstGeom prst="rect">
+            <a:avLst/>
+          </a:prstGeom>
+          <a:solidFill>
+            <a:schemeClr val="dk1"/>
+          </a:solidFill>
+          <a:ln>
+            <a:noFill/>
+          </a:ln>
+        </p:spPr>
+        <p:txBody>
+          <a:bodyPr anchorCtr="0" anchor="ctr" bIns="91425" lIns="91425" spcFirstLastPara="1" rIns="91425" wrap="square" tIns="91425">
+            <a:noAutofit/>
+          </a:bodyPr>
+          <a:lstStyle/>
+          <a:p>
+            <a:pPr indent="0" lvl="0" marL="0" rtl="0" algn="ctr">
+              <a:spcBef>
+                <a:spcPts val="0"/>
+              </a:spcBef>
+              <a:spcAft>
+                <a:spcPts val="0"/>
+              </a:spcAft>
+              <a:buNone/>
+            </a:pPr>
+            <a:r>
+              <a:t/>
+            </a:r>
+            <a:endParaRPr/>
+          </a:p>
+        </p:txBody>
+      </p:sp>
+      <p:sp>
+        <p:nvSpPr>
+          <p:cNvPr id="151" name="Google Shape;151;p25"/>
+          <p:cNvSpPr txBox="1"/>
+          <p:nvPr/>
+        </p:nvSpPr>
+        <p:spPr>
+          <a:xfrm>
+            <a:off x="265350" y="663825"/>
+            <a:ext cx="8943000" cy="561900"/>
+          </a:xfrm>
+          <a:prstGeom prst="rect">
+            <a:avLst/>
+          </a:prstGeom>
+          <a:noFill/>
+          <a:ln>
+            <a:noFill/>
+          </a:ln>
+        </p:spPr>
+        <p:txBody>
+          <a:bodyPr anchorCtr="0" anchor="t" bIns="91425" lIns="91425" spcFirstLastPara="1" rIns="91425" wrap="square" tIns="91425">
+            <a:noAutofit/>
+          </a:bodyPr>
+          <a:lstStyle/>
+          <a:p>
+            <a:pPr indent="0" lvl="0" marL="0" rtl="0" algn="l">
+              <a:spcBef>
+                <a:spcPts val="0"/>
+              </a:spcBef>
+              <a:spcAft>
+                <a:spcPts val="0"/>
+              </a:spcAft>
+              <a:buNone/>
+            </a:pPr>
+            <a:r>
+              <a:rPr lang="en-GB" sz="1600">
+                <a:latin typeface="Google Sans Flex Medium"/>
+                <a:ea typeface="Google Sans Flex Medium"/>
+                <a:cs typeface="Google Sans Flex Medium"/>
+                <a:sym typeface="Google Sans Flex Medium"/>
+              </a:rPr>
+              <a:t>Additional Details/Future Development (if any)</a:t>
+            </a:r>
+            <a:endParaRPr sz="1600">
+              <a:latin typeface="Google Sans Flex Medium"/>
+              <a:ea typeface="Google Sans Flex Medium"/>
+              <a:cs typeface="Google Sans Flex Medium"/>
+              <a:sym typeface="Google Sans Flex Medium"/>
+            </a:endParaRPr>
+          </a:p>
+        </p:txBody>
+      </p:sp>
+    </p:spTree>
+  </p:cSld>
+  <p:clrMapOvr>
+    <a:masterClrMapping/>
+  </p:clrMapOvr>
+</p:sld>
+</file>
+
+<file path=ppt/slides/slide34.xml><?xml version="1.0" encoding="utf-8"?>
+<p:sld xmlns:a="http://schemas.openxmlformats.org/drawingml/2006/main" xmlns:r="http://schemas.openxmlformats.org/officeDocument/2006/relationships" xmlns:mc="http://schemas.openxmlformats.org/markup-compatibility/2006" xmlns:mv="urn:schemas-microsoft-com:mac:vml" xmlns:p="http://schemas.openxmlformats.org/presentationml/2006/main" xmlns:c="http://schemas.openxmlformats.org/drawingml/2006/chart" xmlns:dgm="http://schemas.openxmlformats.org/drawingml/2006/diagram" xmlns:o="urn:schemas-microsoft-com:office:office" xmlns:v="urn:schemas-microsoft-com:vml" xmlns:pvml="urn:schemas-microsoft-com:office:powerpoint" xmlns:com="http://schemas.openxmlformats.org/drawingml/2006/compatibility" xmlns:p14="http://schemas.microsoft.com/office/powerpoint/2010/main" xmlns:p15="http://schemas.microsoft.com/office/powerpoint/2012/main" xmlns:ahyp="http://schemas.microsoft.com/office/drawing/2018/hyperlinkcolor">
+  <p:cSld>
+    <p:spTree>
+      <p:nvGrpSpPr>
+        <p:cNvPr id="147" name="Shape 147"/>
+        <p:cNvGrpSpPr/>
+        <p:nvPr/>
+      </p:nvGrpSpPr>
+      <p:grpSpPr>
+        <a:xfrm>
+          <a:off x="0" y="0"/>
+          <a:ext cx="0" cy="0"/>
+          <a:chOff x="0" y="0"/>
+          <a:chExt cx="0" cy="0"/>
+        </a:xfrm>
+      </p:grpSpPr>
+      <p:pic>
+        <p:nvPicPr>
+          <p:cNvPr id="148" name="Google Shape;148;p25" title="Frame 144.png"/>
+          <p:cNvPicPr preferRelativeResize="0"/>
+          <p:nvPr/>
+        </p:nvPicPr>
+        <p:blipFill rotWithShape="1">
+          <a:blip r:embed="rId3">
+            <a:alphaModFix/>
+          </a:blip>
+          <a:srcRect b="98001" l="0" r="0" t="0"/>
+          <a:stretch/>
+        </p:blipFill>
+        <p:spPr>
+          <a:xfrm>
+            <a:off x="0" y="5093562"/>
+            <a:ext cx="9144000" cy="54275"/>
+          </a:xfrm>
+          <a:prstGeom prst="rect">
+            <a:avLst/>
+          </a:prstGeom>
+          <a:noFill/>
+          <a:ln>
+            <a:noFill/>
+          </a:ln>
+        </p:spPr>
+      </p:pic>
+      <p:pic>
+        <p:nvPicPr>
+          <p:cNvPr id="149" name="Google Shape;149;p25" title="Group 427319979.png"/>
+          <p:cNvPicPr preferRelativeResize="0"/>
+          <p:nvPr/>
+        </p:nvPicPr>
+        <p:blipFill>
+          <a:blip r:embed="rId4">
+            <a:alphaModFix/>
+          </a:blip>
+          <a:stretch>
+            <a:fillRect/>
+          </a:stretch>
+        </p:blipFill>
+        <p:spPr>
+          <a:xfrm>
+            <a:off x="0" y="1"/>
+            <a:ext cx="9144000" cy="507359"/>
+          </a:xfrm>
+          <a:prstGeom prst="rect">
+            <a:avLst/>
+          </a:prstGeom>
+          <a:noFill/>
+          <a:ln>
+            <a:noFill/>
+          </a:ln>
+        </p:spPr>
+      </p:pic>
+      <p:sp>
+        <p:nvSpPr>
+          <p:cNvPr id="150" name="Google Shape;150;p25"/>
+          <p:cNvSpPr/>
+          <p:nvPr/>
+        </p:nvSpPr>
+        <p:spPr>
+          <a:xfrm>
+            <a:off x="-29250" y="5071875"/>
+            <a:ext cx="9173400" cy="97800"/>
+          </a:xfrm>
+          <a:prstGeom prst="rect">
+            <a:avLst/>
+          </a:prstGeom>
+          <a:solidFill>
+            <a:schemeClr val="dk1"/>
+          </a:solidFill>
+          <a:ln>
+            <a:noFill/>
+          </a:ln>
+        </p:spPr>
+        <p:txBody>
+          <a:bodyPr anchorCtr="0" anchor="ctr" bIns="91425" lIns="91425" spcFirstLastPara="1" rIns="91425" wrap="square" tIns="91425">
+            <a:noAutofit/>
+          </a:bodyPr>
+          <a:lstStyle/>
+          <a:p>
+            <a:pPr indent="0" lvl="0" marL="0" rtl="0" algn="ctr">
+              <a:spcBef>
+                <a:spcPts val="0"/>
+              </a:spcBef>
+              <a:spcAft>
+                <a:spcPts val="0"/>
+              </a:spcAft>
+              <a:buNone/>
+            </a:pPr>
+            <a:r>
+              <a:t/>
+            </a:r>
+            <a:endParaRPr/>
+          </a:p>
+        </p:txBody>
+      </p:sp>
+      <p:sp>
+        <p:nvSpPr>
+          <p:cNvPr id="151" name="Google Shape;151;p25"/>
+          <p:cNvSpPr txBox="1"/>
+          <p:nvPr/>
+        </p:nvSpPr>
+        <p:spPr>
+          <a:xfrm>
+            <a:off x="265350" y="663825"/>
+            <a:ext cx="8943000" cy="561900"/>
+          </a:xfrm>
+          <a:prstGeom prst="rect">
+            <a:avLst/>
+          </a:prstGeom>
+          <a:noFill/>
+          <a:ln>
+            <a:noFill/>
+          </a:ln>
+        </p:spPr>
+        <p:txBody>
+          <a:bodyPr anchorCtr="0" anchor="t" bIns="91425" lIns="91425" spcFirstLastPara="1" rIns="91425" wrap="square" tIns="91425">
+            <a:noAutofit/>
+          </a:bodyPr>
+          <a:lstStyle/>
+          <a:p>
+            <a:pPr indent="0" lvl="0" marL="0" rtl="0" algn="l">
+              <a:spcBef>
+                <a:spcPts val="0"/>
+              </a:spcBef>
+              <a:spcAft>
+                <a:spcPts val="0"/>
+              </a:spcAft>
+              <a:buNone/>
+            </a:pPr>
+            <a:r>
+              <a:rPr lang="en-GB" sz="1600">
+                <a:latin typeface="Google Sans Flex Medium"/>
+                <a:ea typeface="Google Sans Flex Medium"/>
+                <a:cs typeface="Google Sans Flex Medium"/>
+                <a:sym typeface="Google Sans Flex Medium"/>
+              </a:rPr>
+              <a:t>Additional Details/Future Development (if any)</a:t>
+            </a:r>
+            <a:endParaRPr sz="1600">
+              <a:latin typeface="Google Sans Flex Medium"/>
+              <a:ea typeface="Google Sans Flex Medium"/>
+              <a:cs typeface="Google Sans Flex Medium"/>
+              <a:sym typeface="Google Sans Flex Medium"/>
+            </a:endParaRPr>
+          </a:p>
+        </p:txBody>
+      </p:sp>
+    </p:spTree>
+  </p:cSld>
+  <p:clrMapOvr>
+    <a:masterClrMapping/>
+  </p:clrMapOvr>
+</p:sld>
+</file>
+
+<file path=ppt/slides/slide35.xml><?xml version="1.0" encoding="utf-8"?>
+<p:sld xmlns:a="http://schemas.openxmlformats.org/drawingml/2006/main" xmlns:r="http://schemas.openxmlformats.org/officeDocument/2006/relationships" xmlns:mc="http://schemas.openxmlformats.org/markup-compatibility/2006" xmlns:mv="urn:schemas-microsoft-com:mac:vml" xmlns:p="http://schemas.openxmlformats.org/presentationml/2006/main" xmlns:c="http://schemas.openxmlformats.org/drawingml/2006/chart" xmlns:dgm="http://schemas.openxmlformats.org/drawingml/2006/diagram" xmlns:o="urn:schemas-microsoft-com:office:office" xmlns:v="urn:schemas-microsoft-com:vml" xmlns:pvml="urn:schemas-microsoft-com:office:powerpoint" xmlns:com="http://schemas.openxmlformats.org/drawingml/2006/compatibility" xmlns:p14="http://schemas.microsoft.com/office/powerpoint/2010/main" xmlns:p15="http://schemas.microsoft.com/office/powerpoint/2012/main" xmlns:ahyp="http://schemas.microsoft.com/office/drawing/2018/hyperlinkcolor">
+  <p:cSld>
+    <p:spTree>
+      <p:nvGrpSpPr>
+        <p:cNvPr id="147" name="Shape 147"/>
+        <p:cNvGrpSpPr/>
+        <p:nvPr/>
+      </p:nvGrpSpPr>
+      <p:grpSpPr>
+        <a:xfrm>
+          <a:off x="0" y="0"/>
+          <a:ext cx="0" cy="0"/>
+          <a:chOff x="0" y="0"/>
+          <a:chExt cx="0" cy="0"/>
+        </a:xfrm>
+      </p:grpSpPr>
+      <p:pic>
+        <p:nvPicPr>
+          <p:cNvPr id="148" name="Google Shape;148;p25" title="Frame 144.png"/>
+          <p:cNvPicPr preferRelativeResize="0"/>
+          <p:nvPr/>
+        </p:nvPicPr>
+        <p:blipFill rotWithShape="1">
+          <a:blip r:embed="rId3">
+            <a:alphaModFix/>
+          </a:blip>
+          <a:srcRect b="98001" l="0" r="0" t="0"/>
+          <a:stretch/>
+        </p:blipFill>
+        <p:spPr>
+          <a:xfrm>
+            <a:off x="0" y="5093562"/>
+            <a:ext cx="9144000" cy="54275"/>
+          </a:xfrm>
+          <a:prstGeom prst="rect">
+            <a:avLst/>
+          </a:prstGeom>
+          <a:noFill/>
+          <a:ln>
+            <a:noFill/>
+          </a:ln>
+        </p:spPr>
+      </p:pic>
+      <p:pic>
+        <p:nvPicPr>
+          <p:cNvPr id="149" name="Google Shape;149;p25" title="Group 427319979.png"/>
+          <p:cNvPicPr preferRelativeResize="0"/>
+          <p:nvPr/>
+        </p:nvPicPr>
+        <p:blipFill>
+          <a:blip r:embed="rId4">
+            <a:alphaModFix/>
+          </a:blip>
+          <a:stretch>
+            <a:fillRect/>
+          </a:stretch>
+        </p:blipFill>
+        <p:spPr>
+          <a:xfrm>
+            <a:off x="0" y="1"/>
+            <a:ext cx="9144000" cy="507359"/>
+          </a:xfrm>
+          <a:prstGeom prst="rect">
+            <a:avLst/>
+          </a:prstGeom>
+          <a:noFill/>
+          <a:ln>
+            <a:noFill/>
+          </a:ln>
+        </p:spPr>
+      </p:pic>
+      <p:sp>
+        <p:nvSpPr>
+          <p:cNvPr id="150" name="Google Shape;150;p25"/>
+          <p:cNvSpPr/>
+          <p:nvPr/>
+        </p:nvSpPr>
+        <p:spPr>
+          <a:xfrm>
+            <a:off x="-29250" y="5071875"/>
+            <a:ext cx="9173400" cy="97800"/>
+          </a:xfrm>
+          <a:prstGeom prst="rect">
+            <a:avLst/>
+          </a:prstGeom>
+          <a:solidFill>
+            <a:schemeClr val="dk1"/>
+          </a:solidFill>
+          <a:ln>
+            <a:noFill/>
+          </a:ln>
+        </p:spPr>
+        <p:txBody>
+          <a:bodyPr anchorCtr="0" anchor="ctr" bIns="91425" lIns="91425" spcFirstLastPara="1" rIns="91425" wrap="square" tIns="91425">
+            <a:noAutofit/>
+          </a:bodyPr>
+          <a:lstStyle/>
+          <a:p>
+            <a:pPr indent="0" lvl="0" marL="0" rtl="0" algn="ctr">
+              <a:spcBef>
+                <a:spcPts val="0"/>
+              </a:spcBef>
+              <a:spcAft>
+                <a:spcPts val="0"/>
+              </a:spcAft>
+              <a:buNone/>
+            </a:pPr>
+            <a:r>
+              <a:t/>
+            </a:r>
+            <a:endParaRPr/>
+          </a:p>
+        </p:txBody>
+      </p:sp>
+      <p:sp>
+        <p:nvSpPr>
+          <p:cNvPr id="151" name="Google Shape;151;p25"/>
+          <p:cNvSpPr txBox="1"/>
+          <p:nvPr/>
+        </p:nvSpPr>
+        <p:spPr>
+          <a:xfrm>
+            <a:off x="265350" y="663825"/>
+            <a:ext cx="8943000" cy="561900"/>
+          </a:xfrm>
+          <a:prstGeom prst="rect">
+            <a:avLst/>
+          </a:prstGeom>
+          <a:noFill/>
+          <a:ln>
+            <a:noFill/>
+          </a:ln>
+        </p:spPr>
+        <p:txBody>
+          <a:bodyPr anchorCtr="0" anchor="t" bIns="91425" lIns="91425" spcFirstLastPara="1" rIns="91425" wrap="square" tIns="91425">
+            <a:noAutofit/>
+          </a:bodyPr>
+          <a:lstStyle/>
+          <a:p>
+            <a:pPr indent="0" lvl="0" marL="0" rtl="0" algn="l">
+              <a:spcBef>
+                <a:spcPts val="0"/>
+              </a:spcBef>
+              <a:spcAft>
+                <a:spcPts val="0"/>
+              </a:spcAft>
+              <a:buNone/>
+            </a:pPr>
+            <a:r>
+              <a:rPr lang="en-GB" sz="1600">
+                <a:latin typeface="Google Sans Flex Medium"/>
+                <a:ea typeface="Google Sans Flex Medium"/>
+                <a:cs typeface="Google Sans Flex Medium"/>
+                <a:sym typeface="Google Sans Flex Medium"/>
+              </a:rPr>
+              <a:t>Additional Details/Future Development (if any)</a:t>
             </a:r>
             <a:endParaRPr sz="1600">
               <a:latin typeface="Google Sans Flex Medium"/>
